--- a/daniel-lutziger-churn.pptx
+++ b/daniel-lutziger-churn.pptx
@@ -5,7 +5,7 @@
     <p:sldMasterId id="2147483648" r:id="rId1"/>
   </p:sldMasterIdLst>
   <p:notesMasterIdLst>
-    <p:notesMasterId r:id="rId8"/>
+    <p:notesMasterId r:id="rId7"/>
   </p:notesMasterIdLst>
   <p:sldIdLst>
     <p:sldId id="256" r:id="rId2"/>
@@ -13,7 +13,6 @@
     <p:sldId id="258" r:id="rId4"/>
     <p:sldId id="259" r:id="rId5"/>
     <p:sldId id="260" r:id="rId6"/>
-    <p:sldId id="261" r:id="rId7"/>
   </p:sldIdLst>
   <p:sldSz cx="12192000" cy="6858000"/>
   <p:notesSz cx="6858000" cy="9144000"/>
@@ -112,13 +111,18 @@
       </a:defRPr>
     </a:lvl9pPr>
   </p:defaultTextStyle>
+  <p:extLst>
+    <p:ext uri="{EFAFB233-063F-42B5-8137-9DF3F51BA10A}">
+      <p15:sldGuideLst xmlns:p15="http://schemas.microsoft.com/office/powerpoint/2012/main"/>
+    </p:ext>
+  </p:extLst>
 </p:presentation>
 </file>
 
 <file path=ppt/charts/chart1.xml><?xml version="1.0" encoding="utf-8"?>
 <c:chartSpace xmlns:c="http://schemas.openxmlformats.org/drawingml/2006/chart" xmlns:a="http://schemas.openxmlformats.org/drawingml/2006/main" xmlns:r="http://schemas.openxmlformats.org/officeDocument/2006/relationships" xmlns:c16r2="http://schemas.microsoft.com/office/drawing/2015/06/chart">
   <c:date1904 val="0"/>
-  <c:lang val="de-DE"/>
+  <c:lang val="en-GB"/>
   <c:roundedCorners val="1"/>
   <c:style val="2"/>
   <c:chart>
@@ -138,7 +142,7 @@
               <c:strCache>
                 <c:ptCount val="1"/>
                 <c:pt idx="0">
-                  <c:v>Churners</c:v>
+                  <c:v>Leavers</c:v>
                 </c:pt>
               </c:strCache>
             </c:strRef>
@@ -154,15 +158,9 @@
             <c:idx val="0"/>
             <c:invertIfNegative val="0"/>
             <c:bubble3D val="0"/>
-            <c:spPr>
-              <a:solidFill>
-                <a:srgbClr val="E8A33D"/>
-              </a:solidFill>
-              <a:effectLst/>
-            </c:spPr>
             <c:extLst>
               <c:ext xmlns:c16="http://schemas.microsoft.com/office/drawing/2014/chart" uri="{C3380CC4-5D6E-409C-BE32-E72D297353CC}">
-                <c16:uniqueId val="{00000001-7661-473A-BE7B-0A119F6B4B41}"/>
+                <c16:uniqueId val="{00000000-22E6-4F65-A4DE-3472C8B0F59B}"/>
               </c:ext>
             </c:extLst>
           </c:dPt>
@@ -178,7 +176,7 @@
             </c:spPr>
             <c:extLst>
               <c:ext xmlns:c16="http://schemas.microsoft.com/office/drawing/2014/chart" uri="{C3380CC4-5D6E-409C-BE32-E72D297353CC}">
-                <c16:uniqueId val="{00000003-7661-473A-BE7B-0A119F6B4B41}"/>
+                <c16:uniqueId val="{00000002-22E6-4F65-A4DE-3472C8B0F59B}"/>
               </c:ext>
             </c:extLst>
           </c:dPt>
@@ -203,7 +201,7 @@
                     <a:latin typeface="Calibri"/>
                   </a:defRPr>
                 </a:pPr>
-                <a:endParaRPr lang="de-DE"/>
+                <a:endParaRPr lang="en-CH"/>
               </a:p>
             </c:txPr>
             <c:showLegendKey val="0"/>
@@ -250,7 +248,7 @@
           </c:val>
           <c:extLst>
             <c:ext xmlns:c16="http://schemas.microsoft.com/office/drawing/2014/chart" uri="{C3380CC4-5D6E-409C-BE32-E72D297353CC}">
-              <c16:uniqueId val="{00000004-7661-473A-BE7B-0A119F6B4B41}"/>
+              <c16:uniqueId val="{00000000-2117-F946-BE60-18924CA5F2C3}"/>
             </c:ext>
           </c:extLst>
         </c:ser>
@@ -355,7 +353,7 @@
 <file path=ppt/charts/chart2.xml><?xml version="1.0" encoding="utf-8"?>
 <c:chartSpace xmlns:c="http://schemas.openxmlformats.org/drawingml/2006/chart" xmlns:a="http://schemas.openxmlformats.org/drawingml/2006/main" xmlns:r="http://schemas.openxmlformats.org/officeDocument/2006/relationships" xmlns:c16r2="http://schemas.microsoft.com/office/drawing/2015/06/chart">
   <c:date1904 val="0"/>
-  <c:lang val="de-DE"/>
+  <c:lang val="en-GB"/>
   <c:roundedCorners val="1"/>
   <c:style val="2"/>
   <c:chart>
@@ -375,7 +373,7 @@
               <c:strCache>
                 <c:ptCount val="1"/>
                 <c:pt idx="0">
-                  <c:v>Churn rate %</c:v>
+                  <c:v>Leave rate %</c:v>
                 </c:pt>
               </c:strCache>
             </c:strRef>
@@ -391,15 +389,9 @@
             <c:idx val="0"/>
             <c:invertIfNegative val="0"/>
             <c:bubble3D val="0"/>
-            <c:spPr>
-              <a:solidFill>
-                <a:srgbClr val="E8A33D"/>
-              </a:solidFill>
-              <a:effectLst/>
-            </c:spPr>
             <c:extLst>
               <c:ext xmlns:c16="http://schemas.microsoft.com/office/drawing/2014/chart" uri="{C3380CC4-5D6E-409C-BE32-E72D297353CC}">
-                <c16:uniqueId val="{00000001-0230-42B3-AF56-38822361DA54}"/>
+                <c16:uniqueId val="{00000000-85E8-4CF0-98BD-506F9366862E}"/>
               </c:ext>
             </c:extLst>
           </c:dPt>
@@ -407,15 +399,9 @@
             <c:idx val="1"/>
             <c:invertIfNegative val="0"/>
             <c:bubble3D val="0"/>
-            <c:spPr>
-              <a:solidFill>
-                <a:srgbClr val="E8A33D"/>
-              </a:solidFill>
-              <a:effectLst/>
-            </c:spPr>
             <c:extLst>
               <c:ext xmlns:c16="http://schemas.microsoft.com/office/drawing/2014/chart" uri="{C3380CC4-5D6E-409C-BE32-E72D297353CC}">
-                <c16:uniqueId val="{00000003-0230-42B3-AF56-38822361DA54}"/>
+                <c16:uniqueId val="{00000001-85E8-4CF0-98BD-506F9366862E}"/>
               </c:ext>
             </c:extLst>
           </c:dPt>
@@ -423,15 +409,9 @@
             <c:idx val="2"/>
             <c:invertIfNegative val="0"/>
             <c:bubble3D val="0"/>
-            <c:spPr>
-              <a:solidFill>
-                <a:srgbClr val="E8A33D"/>
-              </a:solidFill>
-              <a:effectLst/>
-            </c:spPr>
             <c:extLst>
               <c:ext xmlns:c16="http://schemas.microsoft.com/office/drawing/2014/chart" uri="{C3380CC4-5D6E-409C-BE32-E72D297353CC}">
-                <c16:uniqueId val="{00000005-0230-42B3-AF56-38822361DA54}"/>
+                <c16:uniqueId val="{00000002-85E8-4CF0-98BD-506F9366862E}"/>
               </c:ext>
             </c:extLst>
           </c:dPt>
@@ -439,15 +419,9 @@
             <c:idx val="3"/>
             <c:invertIfNegative val="0"/>
             <c:bubble3D val="0"/>
-            <c:spPr>
-              <a:solidFill>
-                <a:srgbClr val="E8A33D"/>
-              </a:solidFill>
-              <a:effectLst/>
-            </c:spPr>
             <c:extLst>
               <c:ext xmlns:c16="http://schemas.microsoft.com/office/drawing/2014/chart" uri="{C3380CC4-5D6E-409C-BE32-E72D297353CC}">
-                <c16:uniqueId val="{00000007-0230-42B3-AF56-38822361DA54}"/>
+                <c16:uniqueId val="{00000003-85E8-4CF0-98BD-506F9366862E}"/>
               </c:ext>
             </c:extLst>
           </c:dPt>
@@ -463,7 +437,7 @@
             </c:spPr>
             <c:extLst>
               <c:ext xmlns:c16="http://schemas.microsoft.com/office/drawing/2014/chart" uri="{C3380CC4-5D6E-409C-BE32-E72D297353CC}">
-                <c16:uniqueId val="{00000009-0230-42B3-AF56-38822361DA54}"/>
+                <c16:uniqueId val="{00000005-85E8-4CF0-98BD-506F9366862E}"/>
               </c:ext>
             </c:extLst>
           </c:dPt>
@@ -488,7 +462,7 @@
                     <a:latin typeface="Calibri"/>
                   </a:defRPr>
                 </a:pPr>
-                <a:endParaRPr lang="de-DE"/>
+                <a:endParaRPr lang="en-CH"/>
               </a:p>
             </c:txPr>
             <c:showLegendKey val="0"/>
@@ -553,7 +527,7 @@
           </c:val>
           <c:extLst>
             <c:ext xmlns:c16="http://schemas.microsoft.com/office/drawing/2014/chart" uri="{C3380CC4-5D6E-409C-BE32-E72D297353CC}">
-              <c16:uniqueId val="{0000000A-0230-42B3-AF56-38822361DA54}"/>
+              <c16:uniqueId val="{00000000-544A-4440-98DB-6F4C6B0FA916}"/>
             </c:ext>
           </c:extLst>
         </c:ser>
@@ -624,276 +598,6 @@
         <c:majorTickMark val="out"/>
         <c:minorTickMark val="none"/>
         <c:tickLblPos val="low"/>
-        <c:crossAx val="2094734554"/>
-        <c:crosses val="autoZero"/>
-        <c:crossBetween val="between"/>
-      </c:valAx>
-      <c:spPr>
-        <a:noFill/>
-        <a:ln>
-          <a:noFill/>
-        </a:ln>
-        <a:effectLst/>
-      </c:spPr>
-    </c:plotArea>
-    <c:plotVisOnly val="1"/>
-    <c:dispBlanksAs val="span"/>
-    <c:showDLblsOverMax val="1"/>
-  </c:chart>
-  <c:spPr>
-    <a:solidFill>
-      <a:srgbClr val="FFFFFF"/>
-    </a:solidFill>
-    <a:ln>
-      <a:noFill/>
-    </a:ln>
-    <a:effectLst/>
-  </c:spPr>
-  <c:externalData r:id="rId1">
-    <c:autoUpdate val="0"/>
-  </c:externalData>
-</c:chartSpace>
-</file>
-
-<file path=ppt/charts/chart3.xml><?xml version="1.0" encoding="utf-8"?>
-<c:chartSpace xmlns:c="http://schemas.openxmlformats.org/drawingml/2006/chart" xmlns:a="http://schemas.openxmlformats.org/drawingml/2006/main" xmlns:r="http://schemas.openxmlformats.org/officeDocument/2006/relationships" xmlns:c16r2="http://schemas.microsoft.com/office/drawing/2015/06/chart">
-  <c:date1904 val="0"/>
-  <c:lang val="de-DE"/>
-  <c:roundedCorners val="1"/>
-  <c:style val="2"/>
-  <c:chart>
-    <c:autoTitleDeleted val="1"/>
-    <c:plotArea>
-      <c:layout/>
-      <c:lineChart>
-        <c:grouping val="standard"/>
-        <c:varyColors val="0"/>
-        <c:ser>
-          <c:idx val="0"/>
-          <c:order val="0"/>
-          <c:tx>
-            <c:strRef>
-              <c:f>Sheet1!$B$1</c:f>
-              <c:strCache>
-                <c:ptCount val="1"/>
-                <c:pt idx="0">
-                  <c:v>Expected return (€k)</c:v>
-                </c:pt>
-              </c:strCache>
-            </c:strRef>
-          </c:tx>
-          <c:spPr>
-            <a:ln w="38100" cap="flat">
-              <a:solidFill>
-                <a:srgbClr val="1E2761"/>
-              </a:solidFill>
-              <a:prstDash val="solid"/>
-              <a:round/>
-            </a:ln>
-            <a:effectLst/>
-          </c:spPr>
-          <c:marker>
-            <c:symbol val="circle"/>
-            <c:size val="5"/>
-            <c:spPr>
-              <a:solidFill>
-                <a:srgbClr val="1E2761"/>
-              </a:solidFill>
-              <a:ln w="9525" cap="flat">
-                <a:solidFill>
-                  <a:srgbClr val="1E2761"/>
-                </a:solidFill>
-                <a:prstDash val="solid"/>
-                <a:round/>
-              </a:ln>
-              <a:effectLst/>
-            </c:spPr>
-          </c:marker>
-          <c:cat>
-            <c:strRef>
-              <c:f>Sheet1!$A$2:$A$11</c:f>
-              <c:strCache>
-                <c:ptCount val="10"/>
-                <c:pt idx="0">
-                  <c:v>0%</c:v>
-                </c:pt>
-                <c:pt idx="1">
-                  <c:v>10%</c:v>
-                </c:pt>
-                <c:pt idx="2">
-                  <c:v>20%</c:v>
-                </c:pt>
-                <c:pt idx="3">
-                  <c:v>30%</c:v>
-                </c:pt>
-                <c:pt idx="4">
-                  <c:v>40%</c:v>
-                </c:pt>
-                <c:pt idx="5">
-                  <c:v>50%</c:v>
-                </c:pt>
-                <c:pt idx="6">
-                  <c:v>60%</c:v>
-                </c:pt>
-                <c:pt idx="7">
-                  <c:v>70%</c:v>
-                </c:pt>
-                <c:pt idx="8">
-                  <c:v>80%</c:v>
-                </c:pt>
-                <c:pt idx="9">
-                  <c:v>90%</c:v>
-                </c:pt>
-              </c:strCache>
-            </c:strRef>
-          </c:cat>
-          <c:val>
-            <c:numRef>
-              <c:f>Sheet1!$B$2:$B$11</c:f>
-              <c:numCache>
-                <c:formatCode>General</c:formatCode>
-                <c:ptCount val="10"/>
-                <c:pt idx="0">
-                  <c:v>0</c:v>
-                </c:pt>
-                <c:pt idx="1">
-                  <c:v>18.3</c:v>
-                </c:pt>
-                <c:pt idx="2">
-                  <c:v>29.2</c:v>
-                </c:pt>
-                <c:pt idx="3">
-                  <c:v>31.6</c:v>
-                </c:pt>
-                <c:pt idx="4">
-                  <c:v>28.7</c:v>
-                </c:pt>
-                <c:pt idx="5">
-                  <c:v>23.5</c:v>
-                </c:pt>
-                <c:pt idx="6">
-                  <c:v>16.2</c:v>
-                </c:pt>
-                <c:pt idx="7">
-                  <c:v>7.1</c:v>
-                </c:pt>
-                <c:pt idx="8">
-                  <c:v>-3.6</c:v>
-                </c:pt>
-                <c:pt idx="9">
-                  <c:v>-15</c:v>
-                </c:pt>
-              </c:numCache>
-            </c:numRef>
-          </c:val>
-          <c:smooth val="1"/>
-          <c:extLst>
-            <c:ext xmlns:c16="http://schemas.microsoft.com/office/drawing/2014/chart" uri="{C3380CC4-5D6E-409C-BE32-E72D297353CC}">
-              <c16:uniqueId val="{00000000-E0A2-4C93-A834-B435BF30F1EF}"/>
-            </c:ext>
-          </c:extLst>
-        </c:ser>
-        <c:dLbls>
-          <c:showLegendKey val="0"/>
-          <c:showVal val="0"/>
-          <c:showCatName val="0"/>
-          <c:showSerName val="0"/>
-          <c:showPercent val="0"/>
-          <c:showBubbleSize val="0"/>
-        </c:dLbls>
-        <c:marker val="1"/>
-        <c:smooth val="0"/>
-        <c:axId val="2094734554"/>
-        <c:axId val="2094734552"/>
-      </c:lineChart>
-      <c:catAx>
-        <c:axId val="2094734554"/>
-        <c:scaling>
-          <c:orientation val="minMax"/>
-        </c:scaling>
-        <c:delete val="0"/>
-        <c:axPos val="b"/>
-        <c:numFmt formatCode="General" sourceLinked="1"/>
-        <c:majorTickMark val="out"/>
-        <c:minorTickMark val="none"/>
-        <c:tickLblPos val="low"/>
-        <c:spPr>
-          <a:ln w="12700" cap="flat">
-            <a:solidFill>
-              <a:srgbClr val="888888"/>
-            </a:solidFill>
-            <a:prstDash val="solid"/>
-            <a:round/>
-          </a:ln>
-        </c:spPr>
-        <c:txPr>
-          <a:bodyPr/>
-          <a:lstStyle/>
-          <a:p>
-            <a:pPr>
-              <a:defRPr sz="1050" b="0" i="0" u="none" strike="noStrike">
-                <a:solidFill>
-                  <a:srgbClr val="6B7280"/>
-                </a:solidFill>
-                <a:latin typeface="Calibri"/>
-              </a:defRPr>
-            </a:pPr>
-            <a:endParaRPr lang="en-US"/>
-          </a:p>
-        </c:txPr>
-        <c:crossAx val="2094734552"/>
-        <c:crosses val="autoZero"/>
-        <c:auto val="1"/>
-        <c:lblAlgn val="ctr"/>
-        <c:lblOffset val="100"/>
-        <c:noMultiLvlLbl val="1"/>
-      </c:catAx>
-      <c:valAx>
-        <c:axId val="2094734552"/>
-        <c:scaling>
-          <c:orientation val="minMax"/>
-        </c:scaling>
-        <c:delete val="0"/>
-        <c:axPos val="l"/>
-        <c:majorGridlines>
-          <c:spPr>
-            <a:ln w="6350" cap="flat">
-              <a:solidFill>
-                <a:srgbClr val="E4E8F0"/>
-              </a:solidFill>
-              <a:prstDash val="solid"/>
-              <a:round/>
-            </a:ln>
-          </c:spPr>
-        </c:majorGridlines>
-        <c:numFmt formatCode="General" sourceLinked="0"/>
-        <c:majorTickMark val="out"/>
-        <c:minorTickMark val="none"/>
-        <c:tickLblPos val="nextTo"/>
-        <c:spPr>
-          <a:ln w="12700" cap="flat">
-            <a:solidFill>
-              <a:srgbClr val="888888"/>
-            </a:solidFill>
-            <a:prstDash val="solid"/>
-            <a:round/>
-          </a:ln>
-        </c:spPr>
-        <c:txPr>
-          <a:bodyPr/>
-          <a:lstStyle/>
-          <a:p>
-            <a:pPr>
-              <a:defRPr sz="1050" b="0" i="0" u="none" strike="noStrike">
-                <a:solidFill>
-                  <a:srgbClr val="6B7280"/>
-                </a:solidFill>
-                <a:latin typeface="Calibri"/>
-              </a:defRPr>
-            </a:pPr>
-            <a:endParaRPr lang="en-US"/>
-          </a:p>
-        </c:txPr>
         <c:crossAx val="2094734554"/>
         <c:crosses val="autoZero"/>
         <c:crossBetween val="between"/>
@@ -1007,7 +711,7 @@
           <a:p>
             <a:fld id="{ACC65320-8B45-410B-BA24-D5EBCE8E6ECF}" type="datetimeFigureOut">
               <a:rPr lang="de-CH" smtClean="0"/>
-              <a:t>18.06.2026</a:t>
+              <a:t>18.06.26</a:t>
             </a:fld>
             <a:endParaRPr lang="de-CH"/>
           </a:p>
@@ -1166,7 +870,7 @@
           <a:p>
             <a:fld id="{EB1BB6F6-55F9-4630-8E64-93D9E0063F68}" type="slidenum">
               <a:rPr lang="de-CH" smtClean="0"/>
-              <a:t>‹Nr.›</a:t>
+              <a:t>‹#›</a:t>
             </a:fld>
             <a:endParaRPr lang="de-CH"/>
           </a:p>
@@ -1321,7 +1025,44 @@
           <a:p>
             <a:r>
               <a:rPr lang="en-US" dirty="0"/>
-              <a:t>One line: retention is far cheaper than acquisition, and we can now predict who is about to leave. This deck shows the value, why customers churn, how we'd use it, and what to do.</a:t>
+              <a:t>What if I told you that by the end of this meeting, we will have a way to keep three times as many of the customers who are about to leave us? That is what I want to show you today.
+Welcome - this is a short talk churn, customers leaving, what can actually do
+start with the problem, money problem. getting new customer is expensive - marketing, onboarding, the first discounts, all of it. </a:t>
+            </a:r>
+          </a:p>
+          <a:p>
+            <a:r>
+              <a:rPr lang="en-US" dirty="0"/>
+              <a:t>customer profitable been with us a while. </a:t>
+            </a:r>
+          </a:p>
+          <a:p>
+            <a:r>
+              <a:rPr lang="en-US" dirty="0"/>
+              <a:t>leaves early, paid to bring in, lose them before pay back. </a:t>
+            </a:r>
+          </a:p>
+          <a:p>
+            <a:r>
+              <a:rPr lang="en-US" dirty="0"/>
+              <a:t>Every one of those is money straight off the table.
+right now, ¼ customers leaves. lot of money walking out the door every quarter.
+question not whether churn problem - we know it is. </a:t>
+            </a:r>
+          </a:p>
+          <a:p>
+            <a:r>
+              <a:rPr lang="en-US" dirty="0"/>
+              <a:t>question is: can we see coming, can do something before go? </a:t>
+            </a:r>
+          </a:p>
+          <a:p>
+            <a:endParaRPr lang="en-US" dirty="0"/>
+          </a:p>
+          <a:p>
+            <a:r>
+              <a:rPr lang="en-US" dirty="0"/>
+              <a:t>That is exactly what I will walk through. First, what we built and the value it gives us. Then why customers actually leave. And finally, the concrete things I would do to keep more of them and make us more profitable. Let us get into it.</a:t>
             </a:r>
           </a:p>
         </p:txBody>
@@ -1408,7 +1149,14 @@
           <a:p>
             <a:r>
               <a:rPr lang="en-US" dirty="0"/>
-              <a:t>Headline. If the campaign team contacts 100 customers from the model's top list, about 77 would really have churned, versus only ~27 if they picked at random. That is the 2.9x. ROC-AUC 0.84 is the technical discrimination number for the analysts in the room.</a:t>
+              <a:t>So let us start with what we built, and why it matters.
+The idea is simple. Instead of treating every customer the same, we built a model that looks at each customer and gives them a score - how likely they are to leave us next quarter. Then we sort everyone from most likely to leave down to least likely. So we get a ranked list, with the customers most at risk right at the top.
+Why does that matter? Because today, when we run a retention campaign, we are mostly guessing who to contact. We might message everyone, which is expensive, or pick people more or less at random. With this list, we contact the people who are actually about to leave first.
+Let me show you how much better that is. Look at the chart on the right. Imagine we contact 100 customers. If we take them from the top of the model list, about 77 of those 100 would really have left us. If we just picked 100 customers at random, only about 27 would have been real leavers. So we find almost three times as many of the right people. That is the three-times number from the start.
+In practice, that means we stop wasting offers on people who were never going to leave, and we put them in front of the people who actually need a reason to stay.
+One more important point: we do not have to contact the whole list. We start at the top and go down as far as the budget allows. And there is a sweet spot. The first people are very likely to leave, so an offer there is well spent. Further down, we start spending offers on people who would have stayed anyway, and at some point each extra offer costs more than it saves. So we can tell you the best number of customers to contact, once we know what an offer costs and what a customer is worth.
+And for the technical folks - the model ranks who is more likely to leave correctly about 84 times out of 100, which is strong for this kind of problem. But the number that matters for the business is the one on the screen: three times more of the right customers.
+So that is the value. Next, let us look at why customers are actually leaving, because that is where the money-saving actions come from.</a:t>
             </a:r>
           </a:p>
         </p:txBody>
@@ -1495,7 +1243,15 @@
           <a:p>
             <a:r>
               <a:rPr lang="en-US" dirty="0"/>
-              <a:t>Two independent methods — a model-free association measure and the model's own SHAP attribution — agree on the same drivers, which is why we trust them. Contract type is the single biggest, then early tenure, then the fiber/price story, plus payment method. The profile box is the 'face' of a likely leaver.</a:t>
+              <a:t>So why do customers leave? This is the part that tells us what to actually fix.
+Before the reasons, one thing about trust. I did not just take the model word for it. I checked the reasons two completely different ways - once by looking at the raw data directly, and once by asking the model what it leans on. Both gave me the same answer. So I am confident these are real drivers, not the model making things up.
+Here is what came out, and the chart shows it. The bars are the share of customers who leave, for each group. The dark bar is our company average - about 26%, roughly one in four.
+The single biggest reason is the contract. Customers on a month-to-month contract leave at a much higher rate, while customers locked into a one or two year contract almost never leave. That makes sense - if you can walk away any time, you are far more likely to. This is by far the strongest signal.
+The second one is how new the customer is. Most of our churn happens in the first few months. People sign up, and a big chunk of them are gone before they ever settle in. Once they have been with us a while, they tend to stay.
+Third, fiber. Customers on our fiber product leave at 42%, while customers on DSL leave at only 19%. That is a big gap, and it is a red flag - something about the fiber offer, the price or the service, is pushing people away.
+And fourth, the way people pay. Customers who pay by electronic check leave the most, about 45%. The ones on automatic payment leave far less. Paying by check every time is friction, and friction is a reason to leave.
+Put it all together and you get a picture of a typical at-risk customer - it is on the right. Month-to-month contract, fairly new, on fiber, paying by electronic check, and without the extra services like tech support. When I see a customer like that, the model and I both expect them to leave.
+And here is the good news - every one of these is something we can act on. None of it is the customer is just unhappy and there is nothing we can do. It is contract type, onboarding, a product issue, a payment method. All fixable. Which brings me to the recommendations.</a:t>
             </a:r>
           </a:p>
         </p:txBody>
@@ -1582,7 +1338,13 @@
           <a:p>
             <a:r>
               <a:rPr lang="en-US" dirty="0"/>
-              <a:t>The model is a ranking tool, not a yes/no classifier. Campaign managers take the top-K, where K comes from their budget. The curve shows that going too wide wastes offers on people who would have stayed — there's a sweet spot. The exact optimum depends on finance's numbers; the analysis provides the curve.</a:t>
+              <a:t>So here is what I would actually do. Five things, roughly in order of how much they would move the needle.
+Number one, the big one: get our month-to-month customers onto yearly contracts. We saw that locked-in customers barely leave. So if we give the at-risk month-to-month customers a good reason to commit - a small discount, a better deal for signing up for a year - we turn our highest-risk group into our safest one. This is the single biggest lever we have.
+Number two: look into fiber. We cannot ignore a product that loses 42% of its customers when the alternative loses 19%. I am not saying I know the cause yet - it could be price, service quality, or expectations. But it is clearly worth a proper look, because it is a lot of customers.
+Number three: move the electronic-check payers onto automatic payment. This one is relatively easy. Paying by check every month is a hassle, and those customers leave the most. If we make it easy to switch to card or bank auto-pay, we take that friction away.
+Number four: take better care of new customers in their first few months. That is when most people leave. Better onboarding, a check-in, some early attention - catching people before they drift off is much cheaper than winning them back later.
+And number five, a bit different but important. When we run a campaign, I would hold back a small group of at-risk customers we deliberately do not contact. Why? So we can compare. If the customers we contacted stay more than the ones we did not, we have proven the campaign works, and we can put a real number on how much money it saved. Without that comparison we are guessing whether our efforts did anything. It also tells us how well the offers actually work, which feeds straight back into how big to make the next campaign.
+So that is the plan. The first four are the actions, and the fifth is how we prove they are worth it. Together, this is how we go from knowing who is leaving to actually keeping more of them, and showing the savings.</a:t>
             </a:r>
           </a:p>
         </p:txBody>
@@ -1669,7 +1431,10 @@
           <a:p>
             <a:r>
               <a:rPr lang="en-US" dirty="0"/>
-              <a:t>Five actions, ordered by leverage. The first three come straight from the drivers. The fourth addresses the early-tenure cliff. The fifth is how we prove it works and turn the assumed save-rate into a measured one — it feeds back into the profit model.</a:t>
+              <a:t>So to bring it together. We started with a simple promise - keeping three times as many of our leaving customers. Here is how we get there.
+We can already find three out of every four leavers on our top list. We know the main reasons they go, and we know they are all things we can fix. And we have a clear set of actions to do it.
+The next step I would suggest is simple: let us try it on the very next retention campaign. We use the model to pick who to contact, we keep that small control group so we can measure the result properly, and we look at the outcome in money - how much we saved - not just in model accuracy. Then we keep the model fresh by updating it every quarter as new results come in.
+That is it from me. I am happy to take any questions.</a:t>
             </a:r>
           </a:p>
         </p:txBody>
@@ -1692,93 +1457,6 @@
             <a:fld id="{F7021451-1387-4CA6-816F-3879F97B5CBC}" type="slidenum">
               <a:rPr lang="en-US"/>
               <a:t>5</a:t>
-            </a:fld>
-            <a:endParaRPr lang="en-US"/>
-          </a:p>
-        </p:txBody>
-      </p:sp>
-    </p:spTree>
-    <p:extLst>
-      <p:ext uri="{BB962C8B-B14F-4D97-AF65-F5344CB8AC3E}">
-        <p14:creationId xmlns:p14="http://schemas.microsoft.com/office/powerpoint/2010/main" val="1024086991"/>
-      </p:ext>
-    </p:extLst>
-  </p:cSld>
-  <p:clrMapOvr>
-    <a:masterClrMapping/>
-  </p:clrMapOvr>
-</p:notes>
-</file>
-
-<file path=ppt/notesSlides/notesSlide6.xml><?xml version="1.0" encoding="utf-8"?>
-<p:notes xmlns:a="http://schemas.openxmlformats.org/drawingml/2006/main" xmlns:r="http://schemas.openxmlformats.org/officeDocument/2006/relationships" xmlns:p="http://schemas.openxmlformats.org/presentationml/2006/main">
-  <p:cSld>
-    <p:spTree>
-      <p:nvGrpSpPr>
-        <p:cNvPr id="1" name=""/>
-        <p:cNvGrpSpPr/>
-        <p:nvPr/>
-      </p:nvGrpSpPr>
-      <p:grpSpPr>
-        <a:xfrm>
-          <a:off x="0" y="0"/>
-          <a:ext cx="0" cy="0"/>
-          <a:chOff x="0" y="0"/>
-          <a:chExt cx="0" cy="0"/>
-        </a:xfrm>
-      </p:grpSpPr>
-      <p:sp>
-        <p:nvSpPr>
-          <p:cNvPr id="2" name="Slide Image Placeholder 1"/>
-          <p:cNvSpPr>
-            <a:spLocks noGrp="1" noRot="1" noChangeAspect="1"/>
-          </p:cNvSpPr>
-          <p:nvPr>
-            <p:ph type="sldImg"/>
-          </p:nvPr>
-        </p:nvSpPr>
-        <p:spPr/>
-      </p:sp>
-      <p:sp>
-        <p:nvSpPr>
-          <p:cNvPr id="3" name="Notes Placeholder 2"/>
-          <p:cNvSpPr>
-            <a:spLocks noGrp="1"/>
-          </p:cNvSpPr>
-          <p:nvPr>
-            <p:ph type="body" idx="1"/>
-          </p:nvPr>
-        </p:nvSpPr>
-        <p:spPr/>
-        <p:txBody>
-          <a:bodyPr/>
-          <a:lstStyle/>
-          <a:p>
-            <a:r>
-              <a:rPr lang="en-US" dirty="0"/>
-              <a:t>Close on action: this is ready to pilot. Run it on the next campaign against a control group so we can put a euro figure on the return, then retrain quarterly. Invite questions.</a:t>
-            </a:r>
-          </a:p>
-        </p:txBody>
-      </p:sp>
-      <p:sp>
-        <p:nvSpPr>
-          <p:cNvPr id="4" name="Slide Number Placeholder 3"/>
-          <p:cNvSpPr>
-            <a:spLocks noGrp="1"/>
-          </p:cNvSpPr>
-          <p:nvPr>
-            <p:ph type="sldNum" sz="quarter" idx="10"/>
-          </p:nvPr>
-        </p:nvSpPr>
-        <p:spPr/>
-        <p:txBody>
-          <a:bodyPr/>
-          <a:lstStyle/>
-          <a:p>
-            <a:fld id="{F7021451-1387-4CA6-816F-3879F97B5CBC}" type="slidenum">
-              <a:rPr lang="en-US"/>
-              <a:t>6</a:t>
             </a:fld>
             <a:endParaRPr lang="en-US"/>
           </a:p>
@@ -1946,7 +1624,7 @@
           <a:p>
             <a:fld id="{5A970E99-4862-4E49-B65B-00FB243DAB2E}" type="datetimeFigureOut">
               <a:rPr lang="de-CH" smtClean="0"/>
-              <a:t>18.06.2026</a:t>
+              <a:t>18.06.26</a:t>
             </a:fld>
             <a:endParaRPr lang="de-CH"/>
           </a:p>
@@ -2000,7 +1678,7 @@
           <a:p>
             <a:fld id="{11AE11E8-F191-4004-AA7A-65B711E1AE6D}" type="slidenum">
               <a:rPr lang="de-CH" smtClean="0"/>
-              <a:t>‹Nr.›</a:t>
+              <a:t>‹#›</a:t>
             </a:fld>
             <a:endParaRPr lang="de-CH"/>
           </a:p>
@@ -2146,7 +1824,7 @@
           <a:p>
             <a:fld id="{5A970E99-4862-4E49-B65B-00FB243DAB2E}" type="datetimeFigureOut">
               <a:rPr lang="de-CH" smtClean="0"/>
-              <a:t>18.06.2026</a:t>
+              <a:t>18.06.26</a:t>
             </a:fld>
             <a:endParaRPr lang="de-CH"/>
           </a:p>
@@ -2200,7 +1878,7 @@
           <a:p>
             <a:fld id="{11AE11E8-F191-4004-AA7A-65B711E1AE6D}" type="slidenum">
               <a:rPr lang="de-CH" smtClean="0"/>
-              <a:t>‹Nr.›</a:t>
+              <a:t>‹#›</a:t>
             </a:fld>
             <a:endParaRPr lang="de-CH"/>
           </a:p>
@@ -2356,7 +2034,7 @@
           <a:p>
             <a:fld id="{5A970E99-4862-4E49-B65B-00FB243DAB2E}" type="datetimeFigureOut">
               <a:rPr lang="de-CH" smtClean="0"/>
-              <a:t>18.06.2026</a:t>
+              <a:t>18.06.26</a:t>
             </a:fld>
             <a:endParaRPr lang="de-CH"/>
           </a:p>
@@ -2410,7 +2088,7 @@
           <a:p>
             <a:fld id="{11AE11E8-F191-4004-AA7A-65B711E1AE6D}" type="slidenum">
               <a:rPr lang="de-CH" smtClean="0"/>
-              <a:t>‹Nr.›</a:t>
+              <a:t>‹#›</a:t>
             </a:fld>
             <a:endParaRPr lang="de-CH"/>
           </a:p>
@@ -2454,7 +2132,7 @@
     </p:spTree>
     <p:extLst>
       <p:ext uri="{BB962C8B-B14F-4D97-AF65-F5344CB8AC3E}">
-        <p14:creationId xmlns:p14="http://schemas.microsoft.com/office/powerpoint/2010/main" val="473869891"/>
+        <p14:creationId xmlns:p14="http://schemas.microsoft.com/office/powerpoint/2010/main" val="3763134032"/>
       </p:ext>
     </p:extLst>
   </p:cSld>
@@ -2591,7 +2269,7 @@
           <a:p>
             <a:fld id="{5A970E99-4862-4E49-B65B-00FB243DAB2E}" type="datetimeFigureOut">
               <a:rPr lang="de-CH" smtClean="0"/>
-              <a:t>18.06.2026</a:t>
+              <a:t>18.06.26</a:t>
             </a:fld>
             <a:endParaRPr lang="de-CH"/>
           </a:p>
@@ -2645,7 +2323,7 @@
           <a:p>
             <a:fld id="{11AE11E8-F191-4004-AA7A-65B711E1AE6D}" type="slidenum">
               <a:rPr lang="de-CH" smtClean="0"/>
-              <a:t>‹Nr.›</a:t>
+              <a:t>‹#›</a:t>
             </a:fld>
             <a:endParaRPr lang="de-CH"/>
           </a:p>
@@ -2867,7 +2545,7 @@
           <a:p>
             <a:fld id="{5A970E99-4862-4E49-B65B-00FB243DAB2E}" type="datetimeFigureOut">
               <a:rPr lang="de-CH" smtClean="0"/>
-              <a:t>18.06.2026</a:t>
+              <a:t>18.06.26</a:t>
             </a:fld>
             <a:endParaRPr lang="de-CH"/>
           </a:p>
@@ -2921,7 +2599,7 @@
           <a:p>
             <a:fld id="{11AE11E8-F191-4004-AA7A-65B711E1AE6D}" type="slidenum">
               <a:rPr lang="de-CH" smtClean="0"/>
-              <a:t>‹Nr.›</a:t>
+              <a:t>‹#›</a:t>
             </a:fld>
             <a:endParaRPr lang="de-CH"/>
           </a:p>
@@ -3135,7 +2813,7 @@
           <a:p>
             <a:fld id="{5A970E99-4862-4E49-B65B-00FB243DAB2E}" type="datetimeFigureOut">
               <a:rPr lang="de-CH" smtClean="0"/>
-              <a:t>18.06.2026</a:t>
+              <a:t>18.06.26</a:t>
             </a:fld>
             <a:endParaRPr lang="de-CH"/>
           </a:p>
@@ -3189,7 +2867,7 @@
           <a:p>
             <a:fld id="{11AE11E8-F191-4004-AA7A-65B711E1AE6D}" type="slidenum">
               <a:rPr lang="de-CH" smtClean="0"/>
-              <a:t>‹Nr.›</a:t>
+              <a:t>‹#›</a:t>
             </a:fld>
             <a:endParaRPr lang="de-CH"/>
           </a:p>
@@ -3550,7 +3228,7 @@
           <a:p>
             <a:fld id="{5A970E99-4862-4E49-B65B-00FB243DAB2E}" type="datetimeFigureOut">
               <a:rPr lang="de-CH" smtClean="0"/>
-              <a:t>18.06.2026</a:t>
+              <a:t>18.06.26</a:t>
             </a:fld>
             <a:endParaRPr lang="de-CH"/>
           </a:p>
@@ -3604,7 +3282,7 @@
           <a:p>
             <a:fld id="{11AE11E8-F191-4004-AA7A-65B711E1AE6D}" type="slidenum">
               <a:rPr lang="de-CH" smtClean="0"/>
-              <a:t>‹Nr.›</a:t>
+              <a:t>‹#›</a:t>
             </a:fld>
             <a:endParaRPr lang="de-CH"/>
           </a:p>
@@ -3692,7 +3370,7 @@
           <a:p>
             <a:fld id="{5A970E99-4862-4E49-B65B-00FB243DAB2E}" type="datetimeFigureOut">
               <a:rPr lang="de-CH" smtClean="0"/>
-              <a:t>18.06.2026</a:t>
+              <a:t>18.06.26</a:t>
             </a:fld>
             <a:endParaRPr lang="de-CH"/>
           </a:p>
@@ -3746,7 +3424,7 @@
           <a:p>
             <a:fld id="{11AE11E8-F191-4004-AA7A-65B711E1AE6D}" type="slidenum">
               <a:rPr lang="de-CH" smtClean="0"/>
-              <a:t>‹Nr.›</a:t>
+              <a:t>‹#›</a:t>
             </a:fld>
             <a:endParaRPr lang="de-CH"/>
           </a:p>
@@ -3805,7 +3483,7 @@
           <a:p>
             <a:fld id="{5A970E99-4862-4E49-B65B-00FB243DAB2E}" type="datetimeFigureOut">
               <a:rPr lang="de-CH" smtClean="0"/>
-              <a:t>18.06.2026</a:t>
+              <a:t>18.06.26</a:t>
             </a:fld>
             <a:endParaRPr lang="de-CH"/>
           </a:p>
@@ -3859,7 +3537,7 @@
           <a:p>
             <a:fld id="{11AE11E8-F191-4004-AA7A-65B711E1AE6D}" type="slidenum">
               <a:rPr lang="de-CH" smtClean="0"/>
-              <a:t>‹Nr.›</a:t>
+              <a:t>‹#›</a:t>
             </a:fld>
             <a:endParaRPr lang="de-CH"/>
           </a:p>
@@ -4118,7 +3796,7 @@
           <a:p>
             <a:fld id="{5A970E99-4862-4E49-B65B-00FB243DAB2E}" type="datetimeFigureOut">
               <a:rPr lang="de-CH" smtClean="0"/>
-              <a:t>18.06.2026</a:t>
+              <a:t>18.06.26</a:t>
             </a:fld>
             <a:endParaRPr lang="de-CH"/>
           </a:p>
@@ -4172,7 +3850,7 @@
           <a:p>
             <a:fld id="{11AE11E8-F191-4004-AA7A-65B711E1AE6D}" type="slidenum">
               <a:rPr lang="de-CH" smtClean="0"/>
-              <a:t>‹Nr.›</a:t>
+              <a:t>‹#›</a:t>
             </a:fld>
             <a:endParaRPr lang="de-CH"/>
           </a:p>
@@ -4407,7 +4085,7 @@
           <a:p>
             <a:fld id="{5A970E99-4862-4E49-B65B-00FB243DAB2E}" type="datetimeFigureOut">
               <a:rPr lang="de-CH" smtClean="0"/>
-              <a:t>18.06.2026</a:t>
+              <a:t>18.06.26</a:t>
             </a:fld>
             <a:endParaRPr lang="de-CH"/>
           </a:p>
@@ -4461,7 +4139,7 @@
           <a:p>
             <a:fld id="{11AE11E8-F191-4004-AA7A-65B711E1AE6D}" type="slidenum">
               <a:rPr lang="de-CH" smtClean="0"/>
-              <a:t>‹Nr.›</a:t>
+              <a:t>‹#›</a:t>
             </a:fld>
             <a:endParaRPr lang="de-CH"/>
           </a:p>
@@ -4650,7 +4328,7 @@
           <a:p>
             <a:fld id="{5A970E99-4862-4E49-B65B-00FB243DAB2E}" type="datetimeFigureOut">
               <a:rPr lang="de-CH" smtClean="0"/>
-              <a:t>18.06.2026</a:t>
+              <a:t>18.06.26</a:t>
             </a:fld>
             <a:endParaRPr lang="de-CH"/>
           </a:p>
@@ -4740,7 +4418,7 @@
           <a:p>
             <a:fld id="{11AE11E8-F191-4004-AA7A-65B711E1AE6D}" type="slidenum">
               <a:rPr lang="de-CH" smtClean="0"/>
-              <a:t>‹Nr.›</a:t>
+              <a:t>‹#›</a:t>
             </a:fld>
             <a:endParaRPr lang="de-CH"/>
           </a:p>
@@ -5076,7 +4754,7 @@
         </p:nvSpPr>
         <p:spPr>
           <a:xfrm>
-            <a:off x="975360" y="1889760"/>
+            <a:off x="975360" y="1828800"/>
             <a:ext cx="10241280" cy="426720"/>
           </a:xfrm>
           <a:prstGeom prst="rect">
@@ -5112,7 +4790,7 @@
         </p:nvSpPr>
         <p:spPr>
           <a:xfrm>
-            <a:off x="975360" y="2377440"/>
+            <a:off x="975360" y="2316480"/>
             <a:ext cx="10241280" cy="1219200"/>
           </a:xfrm>
           <a:prstGeom prst="rect">
@@ -5152,7 +4830,7 @@
         </p:nvSpPr>
         <p:spPr>
           <a:xfrm>
-            <a:off x="975360" y="3657600"/>
+            <a:off x="975360" y="3596640"/>
             <a:ext cx="10241280" cy="609600"/>
           </a:xfrm>
           <a:prstGeom prst="rect">
@@ -5174,7 +4852,7 @@
                 <a:ea typeface="Calibri" pitchFamily="34" charset="-122"/>
                 <a:cs typeface="Calibri" pitchFamily="34" charset="-120"/>
               </a:rPr>
-              <a:t>Finding the customers about to leave – before they do</a:t>
+              <a:t>Finding the customers about to leave - before they do</a:t>
             </a:r>
             <a:endParaRPr lang="en-US" sz="2533" dirty="0">
               <a:solidFill>
@@ -5192,7 +4870,7 @@
         </p:nvSpPr>
         <p:spPr>
           <a:xfrm>
-            <a:off x="999744" y="4511040"/>
+            <a:off x="999744" y="4450080"/>
             <a:ext cx="2072640" cy="0"/>
           </a:xfrm>
           <a:prstGeom prst="line">
@@ -5210,7 +4888,7 @@
           <a:bodyPr/>
           <a:lstStyle/>
           <a:p>
-            <a:endParaRPr lang="de-CH" sz="2400"/>
+            <a:endParaRPr lang="en-IN" sz="2400"/>
           </a:p>
         </p:txBody>
       </p:sp>
@@ -5222,7 +4900,7 @@
         </p:nvSpPr>
         <p:spPr>
           <a:xfrm>
-            <a:off x="975360" y="4693920"/>
+            <a:off x="975360" y="4632960"/>
             <a:ext cx="10241280" cy="487680"/>
           </a:xfrm>
           <a:prstGeom prst="rect">
@@ -5236,7 +4914,7 @@
           <a:lstStyle/>
           <a:p>
             <a:r>
-              <a:rPr lang="en-US" sz="1733" dirty="0">
+              <a:rPr lang="en-US" sz="1867" dirty="0">
                 <a:solidFill>
                   <a:srgbClr val="9FB0D8"/>
                 </a:solidFill>
@@ -5244,9 +4922,9 @@
                 <a:ea typeface="Calibri" pitchFamily="34" charset="-122"/>
                 <a:cs typeface="Calibri" pitchFamily="34" charset="-120"/>
               </a:rPr>
-              <a:t>Daniel Lutziger · Management summary  ·  18.06.2026</a:t>
-            </a:r>
-            <a:endParaRPr lang="en-US" sz="1733" dirty="0"/>
+              <a:t>Daniel Lutziger   |   18.06.2026</a:t>
+            </a:r>
+            <a:endParaRPr lang="en-US" sz="1867" dirty="0"/>
           </a:p>
         </p:txBody>
       </p:sp>
@@ -5305,7 +4983,7 @@
                 <a:ea typeface="Calibri" pitchFamily="34" charset="-122"/>
                 <a:cs typeface="Calibri" pitchFamily="34" charset="-120"/>
               </a:rPr>
-              <a:t>THE OPPORTUNITY</a:t>
+              <a:t>WHAT WE BUILT</a:t>
             </a:r>
             <a:endParaRPr lang="en-US" sz="1533" dirty="0"/>
           </a:p>
@@ -5356,7 +5034,7 @@
         <p:spPr>
           <a:xfrm>
             <a:off x="670560" y="1828800"/>
-            <a:ext cx="6096000" cy="1584960"/>
+            <a:ext cx="6096000" cy="1706880"/>
           </a:xfrm>
           <a:prstGeom prst="rect">
             <a:avLst/>
@@ -5382,7 +5060,7 @@
                 <a:ea typeface="Calibri" pitchFamily="34" charset="-122"/>
                 <a:cs typeface="Calibri" pitchFamily="34" charset="-120"/>
               </a:rPr>
-              <a:t>Keeping a customer costs far less than winning a new one. We built a model that ranks every customer by how likely they are to leave next quarter, so retention offers go to the people who actually need them, not to everyone.</a:t>
+              <a:t>Keeping a customer costs far less than winning a new one. The model ranks every customer by how likely they are to leave next quarter, so we contact the highest-risk first - as far as the budget goes, and no further than it pays off.</a:t>
             </a:r>
             <a:endParaRPr lang="en-US" sz="2067" dirty="0"/>
           </a:p>
@@ -5396,12 +5074,12 @@
         </p:nvSpPr>
         <p:spPr>
           <a:xfrm>
-            <a:off x="670560" y="3657600"/>
-            <a:ext cx="6096000" cy="2316480"/>
+            <a:off x="670560" y="3718560"/>
+            <a:ext cx="6096000" cy="2255520"/>
           </a:xfrm>
           <a:prstGeom prst="roundRect">
             <a:avLst>
-              <a:gd name="adj" fmla="val 4211"/>
+              <a:gd name="adj" fmla="val 4324"/>
             </a:avLst>
           </a:prstGeom>
           <a:solidFill>
@@ -5420,7 +5098,7 @@
           <a:bodyPr/>
           <a:lstStyle/>
           <a:p>
-            <a:endParaRPr lang="de-CH" sz="2400"/>
+            <a:endParaRPr lang="en-IN" sz="2400"/>
           </a:p>
         </p:txBody>
       </p:sp>
@@ -5432,7 +5110,7 @@
         </p:nvSpPr>
         <p:spPr>
           <a:xfrm>
-            <a:off x="853440" y="3877056"/>
+            <a:off x="853440" y="3925824"/>
             <a:ext cx="2438400" cy="1341120"/>
           </a:xfrm>
           <a:prstGeom prst="rect">
@@ -5446,7 +5124,7 @@
           <a:lstStyle/>
           <a:p>
             <a:r>
-              <a:rPr lang="en-US" sz="8000" b="1" dirty="0">
+              <a:rPr lang="en-US" sz="7733" b="1" dirty="0">
                 <a:solidFill>
                   <a:srgbClr val="E8A33D"/>
                 </a:solidFill>
@@ -5454,9 +5132,9 @@
                 <a:ea typeface="Cambria" pitchFamily="34" charset="-122"/>
                 <a:cs typeface="Cambria" pitchFamily="34" charset="-120"/>
               </a:rPr>
-              <a:t>2.9×</a:t>
-            </a:r>
-            <a:endParaRPr lang="en-US" sz="8000" dirty="0"/>
+              <a:t>2.9x</a:t>
+            </a:r>
+            <a:endParaRPr lang="en-US" sz="7733" dirty="0"/>
           </a:p>
         </p:txBody>
       </p:sp>
@@ -5468,7 +5146,7 @@
         </p:nvSpPr>
         <p:spPr>
           <a:xfrm>
-            <a:off x="3352800" y="3962400"/>
+            <a:off x="3352800" y="3998976"/>
             <a:ext cx="3230880" cy="1706880"/>
           </a:xfrm>
           <a:prstGeom prst="rect">
@@ -5495,7 +5173,7 @@
                 <a:ea typeface="Calibri" pitchFamily="34" charset="-122"/>
                 <a:cs typeface="Calibri" pitchFamily="34" charset="-120"/>
               </a:rPr>
-              <a:t>more churners found</a:t>
+              <a:t>more leavers found</a:t>
             </a:r>
             <a:endParaRPr lang="en-US" sz="2000" dirty="0"/>
           </a:p>
@@ -5551,7 +5229,7 @@
                 <a:ea typeface="Calibri" pitchFamily="34" charset="-122"/>
                 <a:cs typeface="Calibri" pitchFamily="34" charset="-120"/>
               </a:rPr>
-              <a:t>Real churners found per 100 customers contacted</a:t>
+              <a:t>Real leavers found per 100 customers contacted</a:t>
             </a:r>
             <a:endParaRPr lang="en-US" sz="1733" dirty="0"/>
           </a:p>
@@ -5604,7 +5282,7 @@
                 <a:ea typeface="Calibri" pitchFamily="34" charset="-122"/>
                 <a:cs typeface="Calibri" pitchFamily="34" charset="-120"/>
               </a:rPr>
-              <a:t>Model discrimination: ROC-AUC 0.84  ·  base churn rate 26.5%</a:t>
+              <a:t>Model discrimination: ROC-AUC 0.84   |   base churn rate 26.5%</a:t>
             </a:r>
             <a:endParaRPr lang="en-US" sz="1400" dirty="0"/>
           </a:p>
@@ -5665,7 +5343,7 @@
                 <a:ea typeface="Calibri" pitchFamily="34" charset="-122"/>
                 <a:cs typeface="Calibri" pitchFamily="34" charset="-120"/>
               </a:rPr>
-              <a:t>WHAT DRIVES CHURN</a:t>
+              <a:t>WHAT THE ANALYSIS SHOWS</a:t>
             </a:r>
             <a:endParaRPr lang="en-US" sz="1533" dirty="0"/>
           </a:p>
@@ -5701,7 +5379,7 @@
                 <a:ea typeface="Cambria" pitchFamily="34" charset="-122"/>
                 <a:cs typeface="Cambria" pitchFamily="34" charset="-120"/>
               </a:rPr>
-              <a:t>Who is at risk and why</a:t>
+              <a:t>Who is at risk - and why</a:t>
             </a:r>
             <a:endParaRPr lang="en-US" sz="4000" dirty="0"/>
           </a:p>
@@ -5737,7 +5415,7 @@
                 <a:ea typeface="Calibri" pitchFamily="34" charset="-122"/>
                 <a:cs typeface="Calibri" pitchFamily="34" charset="-120"/>
               </a:rPr>
-              <a:t>Churn rate by the strongest risk factors</a:t>
+              <a:t>Share of customers who leave, by the strongest risk factors</a:t>
             </a:r>
             <a:endParaRPr lang="en-US" sz="1733" dirty="0"/>
           </a:p>
@@ -5791,7 +5469,7 @@
           <a:bodyPr/>
           <a:lstStyle/>
           <a:p>
-            <a:endParaRPr lang="de-CH" sz="2400"/>
+            <a:endParaRPr lang="en-IN" sz="2400"/>
           </a:p>
         </p:txBody>
       </p:sp>
@@ -5889,7 +5567,7 @@
                 <a:ea typeface="Calibri" pitchFamily="34" charset="-122"/>
                 <a:cs typeface="Calibri" pitchFamily="34" charset="-120"/>
               </a:rPr>
-              <a:t>New, is in their first few months</a:t>
+              <a:t>New - in their first few months</a:t>
             </a:r>
             <a:endParaRPr lang="en-US" sz="1933" dirty="0"/>
           </a:p>
@@ -6013,7 +5691,7 @@
                 <a:ea typeface="Calibri" pitchFamily="34" charset="-122"/>
                 <a:cs typeface="Calibri" pitchFamily="34" charset="-120"/>
               </a:rPr>
-              <a:t>HOW WE USE IT</a:t>
+              <a:t>RECOMMENDATIONS</a:t>
             </a:r>
             <a:endParaRPr lang="en-US" sz="1533" dirty="0"/>
           </a:p>
@@ -6049,7 +5727,7 @@
                 <a:ea typeface="Cambria" pitchFamily="34" charset="-122"/>
                 <a:cs typeface="Cambria" pitchFamily="34" charset="-120"/>
               </a:rPr>
-              <a:t>Turning risk scores into return</a:t>
+              <a:t>What I would do</a:t>
             </a:r>
             <a:endParaRPr lang="en-US" sz="4000" dirty="0"/>
           </a:p>
@@ -6057,14 +5735,94 @@
       </p:sp>
       <p:sp>
         <p:nvSpPr>
-          <p:cNvPr id="4" name="Text 2"/>
+          <p:cNvPr id="4" name="Shape 2"/>
           <p:cNvSpPr/>
           <p:nvPr/>
         </p:nvSpPr>
         <p:spPr>
           <a:xfrm>
             <a:off x="670560" y="1767840"/>
-            <a:ext cx="6827520" cy="487680"/>
+            <a:ext cx="10850880" cy="902208"/>
+          </a:xfrm>
+          <a:prstGeom prst="roundRect">
+            <a:avLst>
+              <a:gd name="adj" fmla="val 8108"/>
+            </a:avLst>
+          </a:prstGeom>
+          <a:solidFill>
+            <a:srgbClr val="F3F5FA"/>
+          </a:solidFill>
+          <a:ln/>
+        </p:spPr>
+        <p:txBody>
+          <a:bodyPr/>
+          <a:lstStyle/>
+          <a:p>
+            <a:endParaRPr lang="en-IN" sz="2400"/>
+          </a:p>
+        </p:txBody>
+      </p:sp>
+      <p:sp>
+        <p:nvSpPr>
+          <p:cNvPr id="5" name="Shape 3"/>
+          <p:cNvSpPr/>
+          <p:nvPr/>
+        </p:nvSpPr>
+        <p:spPr>
+          <a:xfrm>
+            <a:off x="877824" y="1914144"/>
+            <a:ext cx="609600" cy="609600"/>
+          </a:xfrm>
+          <a:prstGeom prst="ellipse">
+            <a:avLst/>
+          </a:prstGeom>
+          <a:solidFill>
+            <a:srgbClr val="CADCFC"/>
+          </a:solidFill>
+          <a:ln/>
+        </p:spPr>
+        <p:txBody>
+          <a:bodyPr/>
+          <a:lstStyle/>
+          <a:p>
+            <a:endParaRPr lang="en-IN" sz="2400"/>
+          </a:p>
+        </p:txBody>
+      </p:sp>
+      <p:pic>
+        <p:nvPicPr>
+          <p:cNvPr id="6" name="Image 0" descr="preencoded.png"/>
+          <p:cNvPicPr>
+            <a:picLocks noChangeAspect="1"/>
+          </p:cNvPicPr>
+          <p:nvPr/>
+        </p:nvPicPr>
+        <p:blipFill>
+          <a:blip r:embed="rId3"/>
+          <a:stretch>
+            <a:fillRect/>
+          </a:stretch>
+        </p:blipFill>
+        <p:spPr>
+          <a:xfrm>
+            <a:off x="1024128" y="2072640"/>
+            <a:ext cx="316992" cy="316992"/>
+          </a:xfrm>
+          <a:prstGeom prst="rect">
+            <a:avLst/>
+          </a:prstGeom>
+        </p:spPr>
+      </p:pic>
+      <p:sp>
+        <p:nvSpPr>
+          <p:cNvPr id="7" name="Text 4"/>
+          <p:cNvSpPr/>
+          <p:nvPr/>
+        </p:nvSpPr>
+        <p:spPr>
+          <a:xfrm>
+            <a:off x="1767840" y="1865376"/>
+            <a:ext cx="9570720" cy="390144"/>
           </a:xfrm>
           <a:prstGeom prst="rect">
             <a:avLst/>
@@ -6077,7 +5835,7 @@
           <a:lstStyle/>
           <a:p>
             <a:r>
-              <a:rPr lang="en-US" sz="1733" b="1" dirty="0">
+              <a:rPr lang="en-US" sz="1933" b="1" dirty="0">
                 <a:solidFill>
                   <a:srgbClr val="1E2761"/>
                 </a:solidFill>
@@ -6085,38 +5843,22 @@
                 <a:ea typeface="Calibri" pitchFamily="34" charset="-122"/>
                 <a:cs typeface="Calibri" pitchFamily="34" charset="-120"/>
               </a:rPr>
-              <a:t>Expected return vs. how many customers we contact</a:t>
-            </a:r>
-            <a:endParaRPr lang="en-US" sz="1733" dirty="0"/>
-          </a:p>
-        </p:txBody>
-      </p:sp>
-      <p:graphicFrame>
-        <p:nvGraphicFramePr>
-          <p:cNvPr id="5" name="Chart 0"/>
-          <p:cNvGraphicFramePr/>
-          <p:nvPr/>
-        </p:nvGraphicFramePr>
-        <p:xfrm>
-          <a:off x="609600" y="2255520"/>
-          <a:ext cx="6888480" cy="3962400"/>
-        </p:xfrm>
-        <a:graphic>
-          <a:graphicData uri="http://schemas.openxmlformats.org/drawingml/2006/chart">
-            <c:chart xmlns:c="http://schemas.openxmlformats.org/drawingml/2006/chart" xmlns:r="http://schemas.openxmlformats.org/officeDocument/2006/relationships" r:id="rId3"/>
-          </a:graphicData>
-        </a:graphic>
-      </p:graphicFrame>
-      <p:sp>
-        <p:nvSpPr>
-          <p:cNvPr id="6" name="Text 3"/>
+              <a:t>Move month-to-month customers to yearly contracts</a:t>
+            </a:r>
+            <a:endParaRPr lang="en-US" sz="1933" dirty="0"/>
+          </a:p>
+        </p:txBody>
+      </p:sp>
+      <p:sp>
+        <p:nvSpPr>
+          <p:cNvPr id="8" name="Text 5"/>
           <p:cNvSpPr/>
           <p:nvPr/>
         </p:nvSpPr>
         <p:spPr>
           <a:xfrm>
-            <a:off x="2438400" y="2377440"/>
-            <a:ext cx="2682240" cy="365760"/>
+            <a:off x="1767840" y="2231136"/>
+            <a:ext cx="9570720" cy="365760"/>
           </a:xfrm>
           <a:prstGeom prst="rect">
             <a:avLst/>
@@ -6128,92 +5870,8 @@
           <a:bodyPr wrap="square" lIns="0" tIns="0" rIns="0" bIns="0" rtlCol="0" anchor="ctr"/>
           <a:lstStyle/>
           <a:p>
-            <a:pPr algn="ctr"/>
-            <a:r>
-              <a:rPr lang="en-US" sz="1467" b="1" dirty="0">
-                <a:solidFill>
-                  <a:srgbClr val="E8A33D"/>
-                </a:solidFill>
-                <a:latin typeface="Calibri" pitchFamily="34" charset="0"/>
-                <a:ea typeface="Calibri" pitchFamily="34" charset="-122"/>
-                <a:cs typeface="Calibri" pitchFamily="34" charset="-120"/>
-              </a:rPr>
-              <a:t>optimum ≈ top 30%</a:t>
-            </a:r>
-            <a:endParaRPr lang="en-US" sz="1467" dirty="0"/>
-          </a:p>
-        </p:txBody>
-      </p:sp>
-      <p:sp>
-        <p:nvSpPr>
-          <p:cNvPr id="7" name="Text 4"/>
-          <p:cNvSpPr/>
-          <p:nvPr/>
-        </p:nvSpPr>
-        <p:spPr>
-          <a:xfrm>
-            <a:off x="609600" y="6156960"/>
-            <a:ext cx="6888480" cy="365760"/>
-          </a:xfrm>
-          <a:prstGeom prst="rect">
-            <a:avLst/>
-          </a:prstGeom>
-          <a:noFill/>
-          <a:ln/>
-        </p:spPr>
-        <p:txBody>
-          <a:bodyPr wrap="square" lIns="0" tIns="0" rIns="0" bIns="0" rtlCol="0" anchor="ctr"/>
-          <a:lstStyle/>
-          <a:p>
-            <a:pPr algn="ctr"/>
-            <a:r>
-              <a:rPr lang="en-US" sz="1267" i="1" dirty="0">
-                <a:solidFill>
-                  <a:srgbClr val="6B7280"/>
-                </a:solidFill>
-                <a:latin typeface="Calibri" pitchFamily="34" charset="0"/>
-                <a:ea typeface="Calibri" pitchFamily="34" charset="-122"/>
-                <a:cs typeface="Calibri" pitchFamily="34" charset="-120"/>
-              </a:rPr>
-              <a:t>% of customer base contacted (highest risk first)  ·  illustrative: plug in real offer cost &amp; customer value</a:t>
-            </a:r>
-            <a:endParaRPr lang="en-US" sz="1267" dirty="0"/>
-          </a:p>
-        </p:txBody>
-      </p:sp>
-      <p:sp>
-        <p:nvSpPr>
-          <p:cNvPr id="8" name="Text 5"/>
-          <p:cNvSpPr/>
-          <p:nvPr/>
-        </p:nvSpPr>
-        <p:spPr>
-          <a:xfrm>
-            <a:off x="7802880" y="2011680"/>
-            <a:ext cx="3840480" cy="2560320"/>
-          </a:xfrm>
-          <a:prstGeom prst="rect">
-            <a:avLst/>
-          </a:prstGeom>
-          <a:noFill/>
-          <a:ln/>
-        </p:spPr>
-        <p:txBody>
-          <a:bodyPr wrap="square" lIns="0" tIns="0" rIns="0" bIns="0" rtlCol="0" anchor="ctr"/>
-          <a:lstStyle/>
-          <a:p>
-            <a:pPr marL="457189" indent="-457189">
-              <a:lnSpc>
-                <a:spcPct val="105000"/>
-              </a:lnSpc>
-              <a:spcAft>
-                <a:spcPts val="1200"/>
-              </a:spcAft>
-              <a:buSzPct val="100000"/>
-              <a:buChar char="•"/>
-            </a:pPr>
-            <a:r>
-              <a:rPr lang="en-US" sz="1933" dirty="0">
+            <a:r>
+              <a:rPr lang="en-US" sz="1533" dirty="0">
                 <a:solidFill>
                   <a:srgbClr val="2B2F3A"/>
                 </a:solidFill>
@@ -6221,23 +5879,151 @@
                 <a:ea typeface="Calibri" pitchFamily="34" charset="-122"/>
                 <a:cs typeface="Calibri" pitchFamily="34" charset="-120"/>
               </a:rPr>
-              <a:t>Rank every active customer by risk each month</a:t>
+              <a:t>The biggest lever by far - locked-in customers barely leave. Give them a reason to commit.</a:t>
+            </a:r>
+            <a:endParaRPr lang="en-US" sz="1533" dirty="0"/>
+          </a:p>
+        </p:txBody>
+      </p:sp>
+      <p:sp>
+        <p:nvSpPr>
+          <p:cNvPr id="9" name="Shape 6"/>
+          <p:cNvSpPr/>
+          <p:nvPr/>
+        </p:nvSpPr>
+        <p:spPr>
+          <a:xfrm>
+            <a:off x="670560" y="2731008"/>
+            <a:ext cx="10850880" cy="902208"/>
+          </a:xfrm>
+          <a:prstGeom prst="roundRect">
+            <a:avLst>
+              <a:gd name="adj" fmla="val 8108"/>
+            </a:avLst>
+          </a:prstGeom>
+          <a:solidFill>
+            <a:srgbClr val="F3F5FA"/>
+          </a:solidFill>
+          <a:ln/>
+        </p:spPr>
+        <p:txBody>
+          <a:bodyPr/>
+          <a:lstStyle/>
+          <a:p>
+            <a:endParaRPr lang="en-IN" sz="2400"/>
+          </a:p>
+        </p:txBody>
+      </p:sp>
+      <p:sp>
+        <p:nvSpPr>
+          <p:cNvPr id="10" name="Shape 7"/>
+          <p:cNvSpPr/>
+          <p:nvPr/>
+        </p:nvSpPr>
+        <p:spPr>
+          <a:xfrm>
+            <a:off x="877824" y="2877312"/>
+            <a:ext cx="609600" cy="609600"/>
+          </a:xfrm>
+          <a:prstGeom prst="ellipse">
+            <a:avLst/>
+          </a:prstGeom>
+          <a:solidFill>
+            <a:srgbClr val="CADCFC"/>
+          </a:solidFill>
+          <a:ln/>
+        </p:spPr>
+        <p:txBody>
+          <a:bodyPr/>
+          <a:lstStyle/>
+          <a:p>
+            <a:endParaRPr lang="en-IN" sz="2400"/>
+          </a:p>
+        </p:txBody>
+      </p:sp>
+      <p:pic>
+        <p:nvPicPr>
+          <p:cNvPr id="11" name="Image 1" descr="preencoded.png"/>
+          <p:cNvPicPr>
+            <a:picLocks noChangeAspect="1"/>
+          </p:cNvPicPr>
+          <p:nvPr/>
+        </p:nvPicPr>
+        <p:blipFill>
+          <a:blip r:embed="rId4"/>
+          <a:stretch>
+            <a:fillRect/>
+          </a:stretch>
+        </p:blipFill>
+        <p:spPr>
+          <a:xfrm>
+            <a:off x="1024128" y="3035808"/>
+            <a:ext cx="316992" cy="316992"/>
+          </a:xfrm>
+          <a:prstGeom prst="rect">
+            <a:avLst/>
+          </a:prstGeom>
+        </p:spPr>
+      </p:pic>
+      <p:sp>
+        <p:nvSpPr>
+          <p:cNvPr id="12" name="Text 8"/>
+          <p:cNvSpPr/>
+          <p:nvPr/>
+        </p:nvSpPr>
+        <p:spPr>
+          <a:xfrm>
+            <a:off x="1767840" y="2828544"/>
+            <a:ext cx="9570720" cy="390144"/>
+          </a:xfrm>
+          <a:prstGeom prst="rect">
+            <a:avLst/>
+          </a:prstGeom>
+          <a:noFill/>
+          <a:ln/>
+        </p:spPr>
+        <p:txBody>
+          <a:bodyPr wrap="square" lIns="0" tIns="0" rIns="0" bIns="0" rtlCol="0" anchor="ctr"/>
+          <a:lstStyle/>
+          <a:p>
+            <a:r>
+              <a:rPr lang="en-US" sz="1933" b="1" dirty="0">
+                <a:solidFill>
+                  <a:srgbClr val="1E2761"/>
+                </a:solidFill>
+                <a:latin typeface="Calibri" pitchFamily="34" charset="0"/>
+                <a:ea typeface="Calibri" pitchFamily="34" charset="-122"/>
+                <a:cs typeface="Calibri" pitchFamily="34" charset="-120"/>
+              </a:rPr>
+              <a:t>Look into fiber</a:t>
             </a:r>
             <a:endParaRPr lang="en-US" sz="1933" dirty="0"/>
           </a:p>
-          <a:p>
-            <a:pPr marL="457189" indent="-457189">
-              <a:lnSpc>
-                <a:spcPct val="105000"/>
-              </a:lnSpc>
-              <a:spcAft>
-                <a:spcPts val="1200"/>
-              </a:spcAft>
-              <a:buSzPct val="100000"/>
-              <a:buChar char="•"/>
-            </a:pPr>
-            <a:r>
-              <a:rPr lang="en-US" sz="1933" dirty="0">
+        </p:txBody>
+      </p:sp>
+      <p:sp>
+        <p:nvSpPr>
+          <p:cNvPr id="13" name="Text 9"/>
+          <p:cNvSpPr/>
+          <p:nvPr/>
+        </p:nvSpPr>
+        <p:spPr>
+          <a:xfrm>
+            <a:off x="1767840" y="3194304"/>
+            <a:ext cx="9570720" cy="365760"/>
+          </a:xfrm>
+          <a:prstGeom prst="rect">
+            <a:avLst/>
+          </a:prstGeom>
+          <a:noFill/>
+          <a:ln/>
+        </p:spPr>
+        <p:txBody>
+          <a:bodyPr wrap="square" lIns="0" tIns="0" rIns="0" bIns="0" rtlCol="0" anchor="ctr"/>
+          <a:lstStyle/>
+          <a:p>
+            <a:r>
+              <a:rPr lang="en-US" sz="1533" dirty="0">
                 <a:solidFill>
                   <a:srgbClr val="2B2F3A"/>
                 </a:solidFill>
@@ -6245,23 +6031,151 @@
                 <a:ea typeface="Calibri" pitchFamily="34" charset="-122"/>
                 <a:cs typeface="Calibri" pitchFamily="34" charset="-120"/>
               </a:rPr>
-              <a:t>The campaign team contacts the top-K and K is a budget decision, not a fixed cut-off</a:t>
+              <a:t>Fiber leaves at 42% vs 19% on DSL. Something is off - check the price and the service.</a:t>
+            </a:r>
+            <a:endParaRPr lang="en-US" sz="1533" dirty="0"/>
+          </a:p>
+        </p:txBody>
+      </p:sp>
+      <p:sp>
+        <p:nvSpPr>
+          <p:cNvPr id="14" name="Shape 10"/>
+          <p:cNvSpPr/>
+          <p:nvPr/>
+        </p:nvSpPr>
+        <p:spPr>
+          <a:xfrm>
+            <a:off x="670560" y="3694176"/>
+            <a:ext cx="10850880" cy="902208"/>
+          </a:xfrm>
+          <a:prstGeom prst="roundRect">
+            <a:avLst>
+              <a:gd name="adj" fmla="val 8108"/>
+            </a:avLst>
+          </a:prstGeom>
+          <a:solidFill>
+            <a:srgbClr val="F3F5FA"/>
+          </a:solidFill>
+          <a:ln/>
+        </p:spPr>
+        <p:txBody>
+          <a:bodyPr/>
+          <a:lstStyle/>
+          <a:p>
+            <a:endParaRPr lang="en-IN" sz="2400"/>
+          </a:p>
+        </p:txBody>
+      </p:sp>
+      <p:sp>
+        <p:nvSpPr>
+          <p:cNvPr id="15" name="Shape 11"/>
+          <p:cNvSpPr/>
+          <p:nvPr/>
+        </p:nvSpPr>
+        <p:spPr>
+          <a:xfrm>
+            <a:off x="877824" y="3840480"/>
+            <a:ext cx="609600" cy="609600"/>
+          </a:xfrm>
+          <a:prstGeom prst="ellipse">
+            <a:avLst/>
+          </a:prstGeom>
+          <a:solidFill>
+            <a:srgbClr val="CADCFC"/>
+          </a:solidFill>
+          <a:ln/>
+        </p:spPr>
+        <p:txBody>
+          <a:bodyPr/>
+          <a:lstStyle/>
+          <a:p>
+            <a:endParaRPr lang="en-IN" sz="2400"/>
+          </a:p>
+        </p:txBody>
+      </p:sp>
+      <p:pic>
+        <p:nvPicPr>
+          <p:cNvPr id="16" name="Image 2" descr="preencoded.png"/>
+          <p:cNvPicPr>
+            <a:picLocks noChangeAspect="1"/>
+          </p:cNvPicPr>
+          <p:nvPr/>
+        </p:nvPicPr>
+        <p:blipFill>
+          <a:blip r:embed="rId5"/>
+          <a:stretch>
+            <a:fillRect/>
+          </a:stretch>
+        </p:blipFill>
+        <p:spPr>
+          <a:xfrm>
+            <a:off x="1024128" y="3998976"/>
+            <a:ext cx="316992" cy="316992"/>
+          </a:xfrm>
+          <a:prstGeom prst="rect">
+            <a:avLst/>
+          </a:prstGeom>
+        </p:spPr>
+      </p:pic>
+      <p:sp>
+        <p:nvSpPr>
+          <p:cNvPr id="17" name="Text 12"/>
+          <p:cNvSpPr/>
+          <p:nvPr/>
+        </p:nvSpPr>
+        <p:spPr>
+          <a:xfrm>
+            <a:off x="1767840" y="3791712"/>
+            <a:ext cx="9570720" cy="390144"/>
+          </a:xfrm>
+          <a:prstGeom prst="rect">
+            <a:avLst/>
+          </a:prstGeom>
+          <a:noFill/>
+          <a:ln/>
+        </p:spPr>
+        <p:txBody>
+          <a:bodyPr wrap="square" lIns="0" tIns="0" rIns="0" bIns="0" rtlCol="0" anchor="ctr"/>
+          <a:lstStyle/>
+          <a:p>
+            <a:r>
+              <a:rPr lang="en-US" sz="1933" b="1" dirty="0">
+                <a:solidFill>
+                  <a:srgbClr val="1E2761"/>
+                </a:solidFill>
+                <a:latin typeface="Calibri" pitchFamily="34" charset="0"/>
+                <a:ea typeface="Calibri" pitchFamily="34" charset="-122"/>
+                <a:cs typeface="Calibri" pitchFamily="34" charset="-120"/>
+              </a:rPr>
+              <a:t>Move electronic-check payers to auto-pay</a:t>
             </a:r>
             <a:endParaRPr lang="en-US" sz="1933" dirty="0"/>
           </a:p>
-          <a:p>
-            <a:pPr marL="457189" indent="-457189">
-              <a:lnSpc>
-                <a:spcPct val="105000"/>
-              </a:lnSpc>
-              <a:spcAft>
-                <a:spcPts val="1200"/>
-              </a:spcAft>
-              <a:buSzPct val="100000"/>
-              <a:buChar char="•"/>
-            </a:pPr>
-            <a:r>
-              <a:rPr lang="en-US" sz="1933" dirty="0">
+        </p:txBody>
+      </p:sp>
+      <p:sp>
+        <p:nvSpPr>
+          <p:cNvPr id="18" name="Text 13"/>
+          <p:cNvSpPr/>
+          <p:nvPr/>
+        </p:nvSpPr>
+        <p:spPr>
+          <a:xfrm>
+            <a:off x="1767840" y="4157472"/>
+            <a:ext cx="9570720" cy="365760"/>
+          </a:xfrm>
+          <a:prstGeom prst="rect">
+            <a:avLst/>
+          </a:prstGeom>
+          <a:noFill/>
+          <a:ln/>
+        </p:spPr>
+        <p:txBody>
+          <a:bodyPr wrap="square" lIns="0" tIns="0" rIns="0" bIns="0" rtlCol="0" anchor="ctr"/>
+          <a:lstStyle/>
+          <a:p>
+            <a:r>
+              <a:rPr lang="en-US" sz="1533" dirty="0">
                 <a:solidFill>
                   <a:srgbClr val="2B2F3A"/>
                 </a:solidFill>
@@ -6269,58 +6183,102 @@
                 <a:ea typeface="Calibri" pitchFamily="34" charset="-122"/>
                 <a:cs typeface="Calibri" pitchFamily="34" charset="-120"/>
               </a:rPr>
-              <a:t>There is an optimal campaign size that maximizes return</a:t>
-            </a:r>
-            <a:endParaRPr lang="en-US" sz="1933" dirty="0"/>
-          </a:p>
-        </p:txBody>
-      </p:sp>
-      <p:sp>
-        <p:nvSpPr>
-          <p:cNvPr id="9" name="Shape 6"/>
+              <a:t>The worst payment method (45%). Take the friction out of paying the bill.</a:t>
+            </a:r>
+            <a:endParaRPr lang="en-US" sz="1533" dirty="0"/>
+          </a:p>
+        </p:txBody>
+      </p:sp>
+      <p:sp>
+        <p:nvSpPr>
+          <p:cNvPr id="19" name="Shape 14"/>
           <p:cNvSpPr/>
           <p:nvPr/>
         </p:nvSpPr>
         <p:spPr>
           <a:xfrm>
-            <a:off x="7802880" y="4693920"/>
-            <a:ext cx="3840480" cy="1524000"/>
+            <a:off x="670560" y="4657344"/>
+            <a:ext cx="10850880" cy="902208"/>
           </a:xfrm>
           <a:prstGeom prst="roundRect">
             <a:avLst>
-              <a:gd name="adj" fmla="val 6400"/>
+              <a:gd name="adj" fmla="val 8108"/>
             </a:avLst>
           </a:prstGeom>
           <a:solidFill>
-            <a:srgbClr val="1E2761"/>
+            <a:srgbClr val="F3F5FA"/>
           </a:solidFill>
           <a:ln/>
-          <a:effectLst>
-            <a:outerShdw blurRad="88900" dist="38100" dir="5400000" algn="bl" rotWithShape="0">
-              <a:srgbClr val="1E2761">
-                <a:alpha val="14000"/>
-              </a:srgbClr>
-            </a:outerShdw>
-          </a:effectLst>
         </p:spPr>
         <p:txBody>
           <a:bodyPr/>
           <a:lstStyle/>
           <a:p>
-            <a:endParaRPr lang="de-CH" sz="2400"/>
-          </a:p>
-        </p:txBody>
-      </p:sp>
-      <p:sp>
-        <p:nvSpPr>
-          <p:cNvPr id="10" name="Text 7"/>
+            <a:endParaRPr lang="en-IN" sz="2400"/>
+          </a:p>
+        </p:txBody>
+      </p:sp>
+      <p:sp>
+        <p:nvSpPr>
+          <p:cNvPr id="20" name="Shape 15"/>
           <p:cNvSpPr/>
           <p:nvPr/>
         </p:nvSpPr>
         <p:spPr>
           <a:xfrm>
-            <a:off x="8046720" y="4815840"/>
-            <a:ext cx="3389376" cy="1280160"/>
+            <a:off x="877824" y="4803648"/>
+            <a:ext cx="609600" cy="609600"/>
+          </a:xfrm>
+          <a:prstGeom prst="ellipse">
+            <a:avLst/>
+          </a:prstGeom>
+          <a:solidFill>
+            <a:srgbClr val="CADCFC"/>
+          </a:solidFill>
+          <a:ln/>
+        </p:spPr>
+        <p:txBody>
+          <a:bodyPr/>
+          <a:lstStyle/>
+          <a:p>
+            <a:endParaRPr lang="en-IN" sz="2400"/>
+          </a:p>
+        </p:txBody>
+      </p:sp>
+      <p:pic>
+        <p:nvPicPr>
+          <p:cNvPr id="21" name="Image 3" descr="preencoded.png"/>
+          <p:cNvPicPr>
+            <a:picLocks noChangeAspect="1"/>
+          </p:cNvPicPr>
+          <p:nvPr/>
+        </p:nvPicPr>
+        <p:blipFill>
+          <a:blip r:embed="rId6"/>
+          <a:stretch>
+            <a:fillRect/>
+          </a:stretch>
+        </p:blipFill>
+        <p:spPr>
+          <a:xfrm>
+            <a:off x="1024128" y="4962144"/>
+            <a:ext cx="316992" cy="316992"/>
+          </a:xfrm>
+          <a:prstGeom prst="rect">
+            <a:avLst/>
+          </a:prstGeom>
+        </p:spPr>
+      </p:pic>
+      <p:sp>
+        <p:nvSpPr>
+          <p:cNvPr id="22" name="Text 16"/>
+          <p:cNvSpPr/>
+          <p:nvPr/>
+        </p:nvSpPr>
+        <p:spPr>
+          <a:xfrm>
+            <a:off x="1767840" y="4754880"/>
+            <a:ext cx="9570720" cy="390144"/>
           </a:xfrm>
           <a:prstGeom prst="rect">
             <a:avLst/>
@@ -6332,23 +6290,206 @@
           <a:bodyPr wrap="square" lIns="0" tIns="0" rIns="0" bIns="0" rtlCol="0" anchor="ctr"/>
           <a:lstStyle/>
           <a:p>
-            <a:pPr>
-              <a:lnSpc>
-                <a:spcPct val="105000"/>
-              </a:lnSpc>
-            </a:pPr>
-            <a:r>
-              <a:rPr lang="en-US" sz="1667" dirty="0">
+            <a:r>
+              <a:rPr lang="en-US" sz="1933" b="1" dirty="0">
                 <a:solidFill>
-                  <a:srgbClr val="FFFFFF"/>
+                  <a:srgbClr val="1E2761"/>
                 </a:solidFill>
                 <a:latin typeface="Calibri" pitchFamily="34" charset="0"/>
                 <a:ea typeface="Calibri" pitchFamily="34" charset="-122"/>
                 <a:cs typeface="Calibri" pitchFamily="34" charset="-120"/>
               </a:rPr>
-              <a:t>Tell us an offer's cost and a saved customer's value and the model returns how many to contact and the expected gain.</a:t>
-            </a:r>
-            <a:endParaRPr lang="en-US" sz="1667" dirty="0"/>
+              <a:t>Win the first few months</a:t>
+            </a:r>
+            <a:endParaRPr lang="en-US" sz="1933" dirty="0"/>
+          </a:p>
+        </p:txBody>
+      </p:sp>
+      <p:sp>
+        <p:nvSpPr>
+          <p:cNvPr id="23" name="Text 17"/>
+          <p:cNvSpPr/>
+          <p:nvPr/>
+        </p:nvSpPr>
+        <p:spPr>
+          <a:xfrm>
+            <a:off x="1767840" y="5120640"/>
+            <a:ext cx="9570720" cy="365760"/>
+          </a:xfrm>
+          <a:prstGeom prst="rect">
+            <a:avLst/>
+          </a:prstGeom>
+          <a:noFill/>
+          <a:ln/>
+        </p:spPr>
+        <p:txBody>
+          <a:bodyPr wrap="square" lIns="0" tIns="0" rIns="0" bIns="0" rtlCol="0" anchor="ctr"/>
+          <a:lstStyle/>
+          <a:p>
+            <a:r>
+              <a:rPr lang="en-US" sz="1533" dirty="0">
+                <a:solidFill>
+                  <a:srgbClr val="2B2F3A"/>
+                </a:solidFill>
+                <a:latin typeface="Calibri" pitchFamily="34" charset="0"/>
+                <a:ea typeface="Calibri" pitchFamily="34" charset="-122"/>
+                <a:cs typeface="Calibri" pitchFamily="34" charset="-120"/>
+              </a:rPr>
+              <a:t>Most people leave early on. Put effort into onboarding and new customers.</a:t>
+            </a:r>
+            <a:endParaRPr lang="en-US" sz="1533" dirty="0"/>
+          </a:p>
+        </p:txBody>
+      </p:sp>
+      <p:sp>
+        <p:nvSpPr>
+          <p:cNvPr id="24" name="Shape 18"/>
+          <p:cNvSpPr/>
+          <p:nvPr/>
+        </p:nvSpPr>
+        <p:spPr>
+          <a:xfrm>
+            <a:off x="670560" y="5620512"/>
+            <a:ext cx="10850880" cy="902208"/>
+          </a:xfrm>
+          <a:prstGeom prst="roundRect">
+            <a:avLst>
+              <a:gd name="adj" fmla="val 8108"/>
+            </a:avLst>
+          </a:prstGeom>
+          <a:solidFill>
+            <a:srgbClr val="F3F5FA"/>
+          </a:solidFill>
+          <a:ln/>
+        </p:spPr>
+        <p:txBody>
+          <a:bodyPr/>
+          <a:lstStyle/>
+          <a:p>
+            <a:endParaRPr lang="en-IN" sz="2400"/>
+          </a:p>
+        </p:txBody>
+      </p:sp>
+      <p:sp>
+        <p:nvSpPr>
+          <p:cNvPr id="25" name="Shape 19"/>
+          <p:cNvSpPr/>
+          <p:nvPr/>
+        </p:nvSpPr>
+        <p:spPr>
+          <a:xfrm>
+            <a:off x="877824" y="5766816"/>
+            <a:ext cx="609600" cy="609600"/>
+          </a:xfrm>
+          <a:prstGeom prst="ellipse">
+            <a:avLst/>
+          </a:prstGeom>
+          <a:solidFill>
+            <a:srgbClr val="CADCFC"/>
+          </a:solidFill>
+          <a:ln/>
+        </p:spPr>
+        <p:txBody>
+          <a:bodyPr/>
+          <a:lstStyle/>
+          <a:p>
+            <a:endParaRPr lang="en-IN" sz="2400"/>
+          </a:p>
+        </p:txBody>
+      </p:sp>
+      <p:pic>
+        <p:nvPicPr>
+          <p:cNvPr id="26" name="Image 4" descr="preencoded.png"/>
+          <p:cNvPicPr>
+            <a:picLocks noChangeAspect="1"/>
+          </p:cNvPicPr>
+          <p:nvPr/>
+        </p:nvPicPr>
+        <p:blipFill>
+          <a:blip r:embed="rId7"/>
+          <a:stretch>
+            <a:fillRect/>
+          </a:stretch>
+        </p:blipFill>
+        <p:spPr>
+          <a:xfrm>
+            <a:off x="1024128" y="5925312"/>
+            <a:ext cx="316992" cy="316992"/>
+          </a:xfrm>
+          <a:prstGeom prst="rect">
+            <a:avLst/>
+          </a:prstGeom>
+        </p:spPr>
+      </p:pic>
+      <p:sp>
+        <p:nvSpPr>
+          <p:cNvPr id="27" name="Text 20"/>
+          <p:cNvSpPr/>
+          <p:nvPr/>
+        </p:nvSpPr>
+        <p:spPr>
+          <a:xfrm>
+            <a:off x="1767840" y="5718048"/>
+            <a:ext cx="9570720" cy="390144"/>
+          </a:xfrm>
+          <a:prstGeom prst="rect">
+            <a:avLst/>
+          </a:prstGeom>
+          <a:noFill/>
+          <a:ln/>
+        </p:spPr>
+        <p:txBody>
+          <a:bodyPr wrap="square" lIns="0" tIns="0" rIns="0" bIns="0" rtlCol="0" anchor="ctr"/>
+          <a:lstStyle/>
+          <a:p>
+            <a:r>
+              <a:rPr lang="en-US" sz="1933" b="1" dirty="0">
+                <a:solidFill>
+                  <a:srgbClr val="1E2761"/>
+                </a:solidFill>
+                <a:latin typeface="Calibri" pitchFamily="34" charset="0"/>
+                <a:ea typeface="Calibri" pitchFamily="34" charset="-122"/>
+                <a:cs typeface="Calibri" pitchFamily="34" charset="-120"/>
+              </a:rPr>
+              <a:t>Keep a control group</a:t>
+            </a:r>
+            <a:endParaRPr lang="en-US" sz="1933" dirty="0"/>
+          </a:p>
+        </p:txBody>
+      </p:sp>
+      <p:sp>
+        <p:nvSpPr>
+          <p:cNvPr id="28" name="Text 21"/>
+          <p:cNvSpPr/>
+          <p:nvPr/>
+        </p:nvSpPr>
+        <p:spPr>
+          <a:xfrm>
+            <a:off x="1767840" y="6083808"/>
+            <a:ext cx="9570720" cy="365760"/>
+          </a:xfrm>
+          <a:prstGeom prst="rect">
+            <a:avLst/>
+          </a:prstGeom>
+          <a:noFill/>
+          <a:ln/>
+        </p:spPr>
+        <p:txBody>
+          <a:bodyPr wrap="square" lIns="0" tIns="0" rIns="0" bIns="0" rtlCol="0" anchor="ctr"/>
+          <a:lstStyle/>
+          <a:p>
+            <a:r>
+              <a:rPr lang="en-US" sz="1533" dirty="0">
+                <a:solidFill>
+                  <a:srgbClr val="2B2F3A"/>
+                </a:solidFill>
+                <a:latin typeface="Calibri" pitchFamily="34" charset="0"/>
+                <a:ea typeface="Calibri" pitchFamily="34" charset="-122"/>
+                <a:cs typeface="Calibri" pitchFamily="34" charset="-120"/>
+              </a:rPr>
+              <a:t>Don't contact a small group on purpose, so we can prove it worked and see the money saved.</a:t>
+            </a:r>
+            <a:endParaRPr lang="en-US" sz="1533" dirty="0"/>
           </a:p>
         </p:txBody>
       </p:sp>
@@ -6385,863 +6526,6 @@
         </p:nvSpPr>
         <p:spPr>
           <a:xfrm>
-            <a:off x="670560" y="390144"/>
-            <a:ext cx="10972800" cy="365760"/>
-          </a:xfrm>
-          <a:prstGeom prst="rect">
-            <a:avLst/>
-          </a:prstGeom>
-          <a:noFill/>
-          <a:ln/>
-        </p:spPr>
-        <p:txBody>
-          <a:bodyPr wrap="square" lIns="0" tIns="0" rIns="0" bIns="0" rtlCol="0" anchor="ctr"/>
-          <a:lstStyle/>
-          <a:p>
-            <a:r>
-              <a:rPr lang="en-US" sz="1533" b="1" kern="0" spc="400" dirty="0">
-                <a:solidFill>
-                  <a:srgbClr val="E8A33D"/>
-                </a:solidFill>
-                <a:latin typeface="Calibri" pitchFamily="34" charset="0"/>
-                <a:ea typeface="Calibri" pitchFamily="34" charset="-122"/>
-                <a:cs typeface="Calibri" pitchFamily="34" charset="-120"/>
-              </a:rPr>
-              <a:t>WHAT TO DO</a:t>
-            </a:r>
-            <a:endParaRPr lang="en-US" sz="1533" dirty="0"/>
-          </a:p>
-        </p:txBody>
-      </p:sp>
-      <p:sp>
-        <p:nvSpPr>
-          <p:cNvPr id="3" name="Text 1"/>
-          <p:cNvSpPr/>
-          <p:nvPr/>
-        </p:nvSpPr>
-        <p:spPr>
-          <a:xfrm>
-            <a:off x="670560" y="731520"/>
-            <a:ext cx="10972800" cy="914400"/>
-          </a:xfrm>
-          <a:prstGeom prst="rect">
-            <a:avLst/>
-          </a:prstGeom>
-          <a:noFill/>
-          <a:ln/>
-        </p:spPr>
-        <p:txBody>
-          <a:bodyPr wrap="square" lIns="0" tIns="0" rIns="0" bIns="0" rtlCol="0" anchor="ctr"/>
-          <a:lstStyle/>
-          <a:p>
-            <a:r>
-              <a:rPr lang="en-US" sz="4000" b="1" dirty="0">
-                <a:solidFill>
-                  <a:srgbClr val="1E2761"/>
-                </a:solidFill>
-                <a:latin typeface="Cambria" pitchFamily="34" charset="0"/>
-                <a:ea typeface="Cambria" pitchFamily="34" charset="-122"/>
-                <a:cs typeface="Cambria" pitchFamily="34" charset="-120"/>
-              </a:rPr>
-              <a:t>Recommendations</a:t>
-            </a:r>
-            <a:endParaRPr lang="en-US" sz="4000" dirty="0"/>
-          </a:p>
-        </p:txBody>
-      </p:sp>
-      <p:sp>
-        <p:nvSpPr>
-          <p:cNvPr id="4" name="Shape 2"/>
-          <p:cNvSpPr/>
-          <p:nvPr/>
-        </p:nvSpPr>
-        <p:spPr>
-          <a:xfrm>
-            <a:off x="670560" y="1767840"/>
-            <a:ext cx="10850880" cy="902208"/>
-          </a:xfrm>
-          <a:prstGeom prst="roundRect">
-            <a:avLst>
-              <a:gd name="adj" fmla="val 8108"/>
-            </a:avLst>
-          </a:prstGeom>
-          <a:solidFill>
-            <a:srgbClr val="F3F5FA"/>
-          </a:solidFill>
-          <a:ln/>
-        </p:spPr>
-        <p:txBody>
-          <a:bodyPr/>
-          <a:lstStyle/>
-          <a:p>
-            <a:endParaRPr lang="de-CH" sz="2400"/>
-          </a:p>
-        </p:txBody>
-      </p:sp>
-      <p:sp>
-        <p:nvSpPr>
-          <p:cNvPr id="5" name="Shape 3"/>
-          <p:cNvSpPr/>
-          <p:nvPr/>
-        </p:nvSpPr>
-        <p:spPr>
-          <a:xfrm>
-            <a:off x="877824" y="1914144"/>
-            <a:ext cx="609600" cy="609600"/>
-          </a:xfrm>
-          <a:prstGeom prst="ellipse">
-            <a:avLst/>
-          </a:prstGeom>
-          <a:solidFill>
-            <a:srgbClr val="CADCFC"/>
-          </a:solidFill>
-          <a:ln/>
-        </p:spPr>
-        <p:txBody>
-          <a:bodyPr/>
-          <a:lstStyle/>
-          <a:p>
-            <a:endParaRPr lang="de-CH" sz="2400"/>
-          </a:p>
-        </p:txBody>
-      </p:sp>
-      <p:pic>
-        <p:nvPicPr>
-          <p:cNvPr id="6" name="Image 0" descr="preencoded.png"/>
-          <p:cNvPicPr>
-            <a:picLocks noChangeAspect="1"/>
-          </p:cNvPicPr>
-          <p:nvPr/>
-        </p:nvPicPr>
-        <p:blipFill>
-          <a:blip r:embed="rId3"/>
-          <a:stretch>
-            <a:fillRect/>
-          </a:stretch>
-        </p:blipFill>
-        <p:spPr>
-          <a:xfrm>
-            <a:off x="1024128" y="2072640"/>
-            <a:ext cx="316992" cy="316992"/>
-          </a:xfrm>
-          <a:prstGeom prst="rect">
-            <a:avLst/>
-          </a:prstGeom>
-        </p:spPr>
-      </p:pic>
-      <p:sp>
-        <p:nvSpPr>
-          <p:cNvPr id="7" name="Text 4"/>
-          <p:cNvSpPr/>
-          <p:nvPr/>
-        </p:nvSpPr>
-        <p:spPr>
-          <a:xfrm>
-            <a:off x="1767840" y="1865376"/>
-            <a:ext cx="9570720" cy="390144"/>
-          </a:xfrm>
-          <a:prstGeom prst="rect">
-            <a:avLst/>
-          </a:prstGeom>
-          <a:noFill/>
-          <a:ln/>
-        </p:spPr>
-        <p:txBody>
-          <a:bodyPr wrap="square" lIns="0" tIns="0" rIns="0" bIns="0" rtlCol="0" anchor="ctr"/>
-          <a:lstStyle/>
-          <a:p>
-            <a:r>
-              <a:rPr lang="en-US" sz="1933" b="1" dirty="0">
-                <a:solidFill>
-                  <a:srgbClr val="1E2761"/>
-                </a:solidFill>
-                <a:latin typeface="Calibri" pitchFamily="34" charset="0"/>
-                <a:ea typeface="Calibri" pitchFamily="34" charset="-122"/>
-                <a:cs typeface="Calibri" pitchFamily="34" charset="-120"/>
-              </a:rPr>
-              <a:t>Move month-to-month customers to annual contracts</a:t>
-            </a:r>
-            <a:endParaRPr lang="en-US" sz="1933" dirty="0"/>
-          </a:p>
-        </p:txBody>
-      </p:sp>
-      <p:sp>
-        <p:nvSpPr>
-          <p:cNvPr id="8" name="Text 5"/>
-          <p:cNvSpPr/>
-          <p:nvPr/>
-        </p:nvSpPr>
-        <p:spPr>
-          <a:xfrm>
-            <a:off x="1767840" y="2231136"/>
-            <a:ext cx="9570720" cy="365760"/>
-          </a:xfrm>
-          <a:prstGeom prst="rect">
-            <a:avLst/>
-          </a:prstGeom>
-          <a:noFill/>
-          <a:ln/>
-        </p:spPr>
-        <p:txBody>
-          <a:bodyPr wrap="square" lIns="0" tIns="0" rIns="0" bIns="0" rtlCol="0" anchor="ctr"/>
-          <a:lstStyle/>
-          <a:p>
-            <a:r>
-              <a:rPr lang="en-US" sz="1533" dirty="0">
-                <a:solidFill>
-                  <a:srgbClr val="2B2F3A"/>
-                </a:solidFill>
-                <a:latin typeface="Calibri" pitchFamily="34" charset="0"/>
-                <a:ea typeface="Calibri" pitchFamily="34" charset="-122"/>
-                <a:cs typeface="Calibri" pitchFamily="34" charset="-120"/>
-              </a:rPr>
-              <a:t>The single biggest lever: locked-in customers barely churn. Incentivize 1-2 year commitments.</a:t>
-            </a:r>
-            <a:endParaRPr lang="en-US" sz="1533" dirty="0"/>
-          </a:p>
-        </p:txBody>
-      </p:sp>
-      <p:sp>
-        <p:nvSpPr>
-          <p:cNvPr id="9" name="Shape 6"/>
-          <p:cNvSpPr/>
-          <p:nvPr/>
-        </p:nvSpPr>
-        <p:spPr>
-          <a:xfrm>
-            <a:off x="670560" y="2731008"/>
-            <a:ext cx="10850880" cy="902208"/>
-          </a:xfrm>
-          <a:prstGeom prst="roundRect">
-            <a:avLst>
-              <a:gd name="adj" fmla="val 8108"/>
-            </a:avLst>
-          </a:prstGeom>
-          <a:solidFill>
-            <a:srgbClr val="F3F5FA"/>
-          </a:solidFill>
-          <a:ln/>
-        </p:spPr>
-        <p:txBody>
-          <a:bodyPr/>
-          <a:lstStyle/>
-          <a:p>
-            <a:endParaRPr lang="de-CH" sz="2400"/>
-          </a:p>
-        </p:txBody>
-      </p:sp>
-      <p:sp>
-        <p:nvSpPr>
-          <p:cNvPr id="10" name="Shape 7"/>
-          <p:cNvSpPr/>
-          <p:nvPr/>
-        </p:nvSpPr>
-        <p:spPr>
-          <a:xfrm>
-            <a:off x="877824" y="2877312"/>
-            <a:ext cx="609600" cy="609600"/>
-          </a:xfrm>
-          <a:prstGeom prst="ellipse">
-            <a:avLst/>
-          </a:prstGeom>
-          <a:solidFill>
-            <a:srgbClr val="CADCFC"/>
-          </a:solidFill>
-          <a:ln/>
-        </p:spPr>
-        <p:txBody>
-          <a:bodyPr/>
-          <a:lstStyle/>
-          <a:p>
-            <a:endParaRPr lang="de-CH" sz="2400"/>
-          </a:p>
-        </p:txBody>
-      </p:sp>
-      <p:pic>
-        <p:nvPicPr>
-          <p:cNvPr id="11" name="Image 1" descr="preencoded.png"/>
-          <p:cNvPicPr>
-            <a:picLocks noChangeAspect="1"/>
-          </p:cNvPicPr>
-          <p:nvPr/>
-        </p:nvPicPr>
-        <p:blipFill>
-          <a:blip r:embed="rId4"/>
-          <a:stretch>
-            <a:fillRect/>
-          </a:stretch>
-        </p:blipFill>
-        <p:spPr>
-          <a:xfrm>
-            <a:off x="1024128" y="3035808"/>
-            <a:ext cx="316992" cy="316992"/>
-          </a:xfrm>
-          <a:prstGeom prst="rect">
-            <a:avLst/>
-          </a:prstGeom>
-        </p:spPr>
-      </p:pic>
-      <p:sp>
-        <p:nvSpPr>
-          <p:cNvPr id="12" name="Text 8"/>
-          <p:cNvSpPr/>
-          <p:nvPr/>
-        </p:nvSpPr>
-        <p:spPr>
-          <a:xfrm>
-            <a:off x="1767840" y="2828544"/>
-            <a:ext cx="9570720" cy="390144"/>
-          </a:xfrm>
-          <a:prstGeom prst="rect">
-            <a:avLst/>
-          </a:prstGeom>
-          <a:noFill/>
-          <a:ln/>
-        </p:spPr>
-        <p:txBody>
-          <a:bodyPr wrap="square" lIns="0" tIns="0" rIns="0" bIns="0" rtlCol="0" anchor="ctr"/>
-          <a:lstStyle/>
-          <a:p>
-            <a:r>
-              <a:rPr lang="en-US" sz="1933" b="1" dirty="0">
-                <a:solidFill>
-                  <a:srgbClr val="1E2761"/>
-                </a:solidFill>
-                <a:latin typeface="Calibri" pitchFamily="34" charset="0"/>
-                <a:ea typeface="Calibri" pitchFamily="34" charset="-122"/>
-                <a:cs typeface="Calibri" pitchFamily="34" charset="-120"/>
-              </a:rPr>
-              <a:t>Fix the fiber experience</a:t>
-            </a:r>
-            <a:endParaRPr lang="en-US" sz="1933" dirty="0"/>
-          </a:p>
-        </p:txBody>
-      </p:sp>
-      <p:sp>
-        <p:nvSpPr>
-          <p:cNvPr id="13" name="Text 9"/>
-          <p:cNvSpPr/>
-          <p:nvPr/>
-        </p:nvSpPr>
-        <p:spPr>
-          <a:xfrm>
-            <a:off x="1767840" y="3194304"/>
-            <a:ext cx="9570720" cy="365760"/>
-          </a:xfrm>
-          <a:prstGeom prst="rect">
-            <a:avLst/>
-          </a:prstGeom>
-          <a:noFill/>
-          <a:ln/>
-        </p:spPr>
-        <p:txBody>
-          <a:bodyPr wrap="square" lIns="0" tIns="0" rIns="0" bIns="0" rtlCol="0" anchor="ctr"/>
-          <a:lstStyle/>
-          <a:p>
-            <a:r>
-              <a:rPr lang="en-US" sz="1533" dirty="0">
-                <a:solidFill>
-                  <a:srgbClr val="2B2F3A"/>
-                </a:solidFill>
-                <a:latin typeface="Calibri" pitchFamily="34" charset="0"/>
-                <a:ea typeface="Calibri" pitchFamily="34" charset="-122"/>
-                <a:cs typeface="Calibri" pitchFamily="34" charset="-120"/>
-              </a:rPr>
-              <a:t>Fiber churns at 42% vs 19% on DSL. Investigate pricing and service quality on this product.</a:t>
-            </a:r>
-            <a:endParaRPr lang="en-US" sz="1533" dirty="0"/>
-          </a:p>
-        </p:txBody>
-      </p:sp>
-      <p:sp>
-        <p:nvSpPr>
-          <p:cNvPr id="14" name="Shape 10"/>
-          <p:cNvSpPr/>
-          <p:nvPr/>
-        </p:nvSpPr>
-        <p:spPr>
-          <a:xfrm>
-            <a:off x="670560" y="3694176"/>
-            <a:ext cx="10850880" cy="902208"/>
-          </a:xfrm>
-          <a:prstGeom prst="roundRect">
-            <a:avLst>
-              <a:gd name="adj" fmla="val 8108"/>
-            </a:avLst>
-          </a:prstGeom>
-          <a:solidFill>
-            <a:srgbClr val="F3F5FA"/>
-          </a:solidFill>
-          <a:ln/>
-        </p:spPr>
-        <p:txBody>
-          <a:bodyPr/>
-          <a:lstStyle/>
-          <a:p>
-            <a:endParaRPr lang="de-CH" sz="2400"/>
-          </a:p>
-        </p:txBody>
-      </p:sp>
-      <p:sp>
-        <p:nvSpPr>
-          <p:cNvPr id="15" name="Shape 11"/>
-          <p:cNvSpPr/>
-          <p:nvPr/>
-        </p:nvSpPr>
-        <p:spPr>
-          <a:xfrm>
-            <a:off x="877824" y="3840480"/>
-            <a:ext cx="609600" cy="609600"/>
-          </a:xfrm>
-          <a:prstGeom prst="ellipse">
-            <a:avLst/>
-          </a:prstGeom>
-          <a:solidFill>
-            <a:srgbClr val="CADCFC"/>
-          </a:solidFill>
-          <a:ln/>
-        </p:spPr>
-        <p:txBody>
-          <a:bodyPr/>
-          <a:lstStyle/>
-          <a:p>
-            <a:endParaRPr lang="de-CH" sz="2400"/>
-          </a:p>
-        </p:txBody>
-      </p:sp>
-      <p:pic>
-        <p:nvPicPr>
-          <p:cNvPr id="16" name="Image 2" descr="preencoded.png"/>
-          <p:cNvPicPr>
-            <a:picLocks noChangeAspect="1"/>
-          </p:cNvPicPr>
-          <p:nvPr/>
-        </p:nvPicPr>
-        <p:blipFill>
-          <a:blip r:embed="rId5"/>
-          <a:stretch>
-            <a:fillRect/>
-          </a:stretch>
-        </p:blipFill>
-        <p:spPr>
-          <a:xfrm>
-            <a:off x="1024128" y="3998976"/>
-            <a:ext cx="316992" cy="316992"/>
-          </a:xfrm>
-          <a:prstGeom prst="rect">
-            <a:avLst/>
-          </a:prstGeom>
-        </p:spPr>
-      </p:pic>
-      <p:sp>
-        <p:nvSpPr>
-          <p:cNvPr id="17" name="Text 12"/>
-          <p:cNvSpPr/>
-          <p:nvPr/>
-        </p:nvSpPr>
-        <p:spPr>
-          <a:xfrm>
-            <a:off x="1767840" y="3791712"/>
-            <a:ext cx="9570720" cy="390144"/>
-          </a:xfrm>
-          <a:prstGeom prst="rect">
-            <a:avLst/>
-          </a:prstGeom>
-          <a:noFill/>
-          <a:ln/>
-        </p:spPr>
-        <p:txBody>
-          <a:bodyPr wrap="square" lIns="0" tIns="0" rIns="0" bIns="0" rtlCol="0" anchor="ctr"/>
-          <a:lstStyle/>
-          <a:p>
-            <a:r>
-              <a:rPr lang="en-US" sz="1933" b="1" dirty="0">
-                <a:solidFill>
-                  <a:srgbClr val="1E2761"/>
-                </a:solidFill>
-                <a:latin typeface="Calibri" pitchFamily="34" charset="0"/>
-                <a:ea typeface="Calibri" pitchFamily="34" charset="-122"/>
-                <a:cs typeface="Calibri" pitchFamily="34" charset="-120"/>
-              </a:rPr>
-              <a:t>Shift electronic-check payers to auto-pay</a:t>
-            </a:r>
-            <a:endParaRPr lang="en-US" sz="1933" dirty="0"/>
-          </a:p>
-        </p:txBody>
-      </p:sp>
-      <p:sp>
-        <p:nvSpPr>
-          <p:cNvPr id="18" name="Text 13"/>
-          <p:cNvSpPr/>
-          <p:nvPr/>
-        </p:nvSpPr>
-        <p:spPr>
-          <a:xfrm>
-            <a:off x="1767840" y="4157472"/>
-            <a:ext cx="9570720" cy="365760"/>
-          </a:xfrm>
-          <a:prstGeom prst="rect">
-            <a:avLst/>
-          </a:prstGeom>
-          <a:noFill/>
-          <a:ln/>
-        </p:spPr>
-        <p:txBody>
-          <a:bodyPr wrap="square" lIns="0" tIns="0" rIns="0" bIns="0" rtlCol="0" anchor="ctr"/>
-          <a:lstStyle/>
-          <a:p>
-            <a:r>
-              <a:rPr lang="en-US" sz="1533" dirty="0">
-                <a:solidFill>
-                  <a:srgbClr val="2B2F3A"/>
-                </a:solidFill>
-                <a:latin typeface="Calibri" pitchFamily="34" charset="0"/>
-                <a:ea typeface="Calibri" pitchFamily="34" charset="-122"/>
-                <a:cs typeface="Calibri" pitchFamily="34" charset="-120"/>
-              </a:rPr>
-              <a:t>The highest-churn payment method (45%). Reduce billing friction with card / bank auto-pay.</a:t>
-            </a:r>
-            <a:endParaRPr lang="en-US" sz="1533" dirty="0"/>
-          </a:p>
-        </p:txBody>
-      </p:sp>
-      <p:sp>
-        <p:nvSpPr>
-          <p:cNvPr id="19" name="Shape 14"/>
-          <p:cNvSpPr/>
-          <p:nvPr/>
-        </p:nvSpPr>
-        <p:spPr>
-          <a:xfrm>
-            <a:off x="670560" y="4657344"/>
-            <a:ext cx="10850880" cy="902208"/>
-          </a:xfrm>
-          <a:prstGeom prst="roundRect">
-            <a:avLst>
-              <a:gd name="adj" fmla="val 8108"/>
-            </a:avLst>
-          </a:prstGeom>
-          <a:solidFill>
-            <a:srgbClr val="F3F5FA"/>
-          </a:solidFill>
-          <a:ln/>
-        </p:spPr>
-        <p:txBody>
-          <a:bodyPr/>
-          <a:lstStyle/>
-          <a:p>
-            <a:endParaRPr lang="de-CH" sz="2400"/>
-          </a:p>
-        </p:txBody>
-      </p:sp>
-      <p:sp>
-        <p:nvSpPr>
-          <p:cNvPr id="20" name="Shape 15"/>
-          <p:cNvSpPr/>
-          <p:nvPr/>
-        </p:nvSpPr>
-        <p:spPr>
-          <a:xfrm>
-            <a:off x="877824" y="4803648"/>
-            <a:ext cx="609600" cy="609600"/>
-          </a:xfrm>
-          <a:prstGeom prst="ellipse">
-            <a:avLst/>
-          </a:prstGeom>
-          <a:solidFill>
-            <a:srgbClr val="CADCFC"/>
-          </a:solidFill>
-          <a:ln/>
-        </p:spPr>
-        <p:txBody>
-          <a:bodyPr/>
-          <a:lstStyle/>
-          <a:p>
-            <a:endParaRPr lang="de-CH" sz="2400"/>
-          </a:p>
-        </p:txBody>
-      </p:sp>
-      <p:pic>
-        <p:nvPicPr>
-          <p:cNvPr id="21" name="Image 3" descr="preencoded.png"/>
-          <p:cNvPicPr>
-            <a:picLocks noChangeAspect="1"/>
-          </p:cNvPicPr>
-          <p:nvPr/>
-        </p:nvPicPr>
-        <p:blipFill>
-          <a:blip r:embed="rId6"/>
-          <a:stretch>
-            <a:fillRect/>
-          </a:stretch>
-        </p:blipFill>
-        <p:spPr>
-          <a:xfrm>
-            <a:off x="1024128" y="4962144"/>
-            <a:ext cx="316992" cy="316992"/>
-          </a:xfrm>
-          <a:prstGeom prst="rect">
-            <a:avLst/>
-          </a:prstGeom>
-        </p:spPr>
-      </p:pic>
-      <p:sp>
-        <p:nvSpPr>
-          <p:cNvPr id="22" name="Text 16"/>
-          <p:cNvSpPr/>
-          <p:nvPr/>
-        </p:nvSpPr>
-        <p:spPr>
-          <a:xfrm>
-            <a:off x="1767840" y="4754880"/>
-            <a:ext cx="9570720" cy="390144"/>
-          </a:xfrm>
-          <a:prstGeom prst="rect">
-            <a:avLst/>
-          </a:prstGeom>
-          <a:noFill/>
-          <a:ln/>
-        </p:spPr>
-        <p:txBody>
-          <a:bodyPr wrap="square" lIns="0" tIns="0" rIns="0" bIns="0" rtlCol="0" anchor="ctr"/>
-          <a:lstStyle/>
-          <a:p>
-            <a:r>
-              <a:rPr lang="en-US" sz="1933" b="1" dirty="0">
-                <a:solidFill>
-                  <a:srgbClr val="1E2761"/>
-                </a:solidFill>
-                <a:latin typeface="Calibri" pitchFamily="34" charset="0"/>
-                <a:ea typeface="Calibri" pitchFamily="34" charset="-122"/>
-                <a:cs typeface="Calibri" pitchFamily="34" charset="-120"/>
-              </a:rPr>
-              <a:t>Win the first 90 days</a:t>
-            </a:r>
-            <a:endParaRPr lang="en-US" sz="1933" dirty="0"/>
-          </a:p>
-        </p:txBody>
-      </p:sp>
-      <p:sp>
-        <p:nvSpPr>
-          <p:cNvPr id="23" name="Text 17"/>
-          <p:cNvSpPr/>
-          <p:nvPr/>
-        </p:nvSpPr>
-        <p:spPr>
-          <a:xfrm>
-            <a:off x="1767840" y="5120640"/>
-            <a:ext cx="9570720" cy="365760"/>
-          </a:xfrm>
-          <a:prstGeom prst="rect">
-            <a:avLst/>
-          </a:prstGeom>
-          <a:noFill/>
-          <a:ln/>
-        </p:spPr>
-        <p:txBody>
-          <a:bodyPr wrap="square" lIns="0" tIns="0" rIns="0" bIns="0" rtlCol="0" anchor="ctr"/>
-          <a:lstStyle/>
-          <a:p>
-            <a:r>
-              <a:rPr lang="en-US" sz="1533" dirty="0">
-                <a:solidFill>
-                  <a:srgbClr val="2B2F3A"/>
-                </a:solidFill>
-                <a:latin typeface="Calibri" pitchFamily="34" charset="0"/>
-                <a:ea typeface="Calibri" pitchFamily="34" charset="-122"/>
-                <a:cs typeface="Calibri" pitchFamily="34" charset="-120"/>
-              </a:rPr>
-              <a:t>Churn peaks in the first months. Strengthen onboarding and early engagement for new customers.</a:t>
-            </a:r>
-            <a:endParaRPr lang="en-US" sz="1533" dirty="0"/>
-          </a:p>
-        </p:txBody>
-      </p:sp>
-      <p:sp>
-        <p:nvSpPr>
-          <p:cNvPr id="24" name="Shape 18"/>
-          <p:cNvSpPr/>
-          <p:nvPr/>
-        </p:nvSpPr>
-        <p:spPr>
-          <a:xfrm>
-            <a:off x="670560" y="5620512"/>
-            <a:ext cx="10850880" cy="902208"/>
-          </a:xfrm>
-          <a:prstGeom prst="roundRect">
-            <a:avLst>
-              <a:gd name="adj" fmla="val 8108"/>
-            </a:avLst>
-          </a:prstGeom>
-          <a:solidFill>
-            <a:srgbClr val="F3F5FA"/>
-          </a:solidFill>
-          <a:ln/>
-        </p:spPr>
-        <p:txBody>
-          <a:bodyPr/>
-          <a:lstStyle/>
-          <a:p>
-            <a:endParaRPr lang="de-CH" sz="2400"/>
-          </a:p>
-        </p:txBody>
-      </p:sp>
-      <p:sp>
-        <p:nvSpPr>
-          <p:cNvPr id="25" name="Shape 19"/>
-          <p:cNvSpPr/>
-          <p:nvPr/>
-        </p:nvSpPr>
-        <p:spPr>
-          <a:xfrm>
-            <a:off x="877824" y="5766816"/>
-            <a:ext cx="609600" cy="609600"/>
-          </a:xfrm>
-          <a:prstGeom prst="ellipse">
-            <a:avLst/>
-          </a:prstGeom>
-          <a:solidFill>
-            <a:srgbClr val="CADCFC"/>
-          </a:solidFill>
-          <a:ln/>
-        </p:spPr>
-        <p:txBody>
-          <a:bodyPr/>
-          <a:lstStyle/>
-          <a:p>
-            <a:endParaRPr lang="de-CH" sz="2400"/>
-          </a:p>
-        </p:txBody>
-      </p:sp>
-      <p:pic>
-        <p:nvPicPr>
-          <p:cNvPr id="26" name="Image 4" descr="preencoded.png"/>
-          <p:cNvPicPr>
-            <a:picLocks noChangeAspect="1"/>
-          </p:cNvPicPr>
-          <p:nvPr/>
-        </p:nvPicPr>
-        <p:blipFill>
-          <a:blip r:embed="rId7"/>
-          <a:stretch>
-            <a:fillRect/>
-          </a:stretch>
-        </p:blipFill>
-        <p:spPr>
-          <a:xfrm>
-            <a:off x="1024128" y="5925312"/>
-            <a:ext cx="316992" cy="316992"/>
-          </a:xfrm>
-          <a:prstGeom prst="rect">
-            <a:avLst/>
-          </a:prstGeom>
-        </p:spPr>
-      </p:pic>
-      <p:sp>
-        <p:nvSpPr>
-          <p:cNvPr id="27" name="Text 20"/>
-          <p:cNvSpPr/>
-          <p:nvPr/>
-        </p:nvSpPr>
-        <p:spPr>
-          <a:xfrm>
-            <a:off x="1767840" y="5718048"/>
-            <a:ext cx="9570720" cy="390144"/>
-          </a:xfrm>
-          <a:prstGeom prst="rect">
-            <a:avLst/>
-          </a:prstGeom>
-          <a:noFill/>
-          <a:ln/>
-        </p:spPr>
-        <p:txBody>
-          <a:bodyPr wrap="square" lIns="0" tIns="0" rIns="0" bIns="0" rtlCol="0" anchor="ctr"/>
-          <a:lstStyle/>
-          <a:p>
-            <a:r>
-              <a:rPr lang="en-US" sz="1933" b="1" dirty="0">
-                <a:solidFill>
-                  <a:srgbClr val="1E2761"/>
-                </a:solidFill>
-                <a:latin typeface="Calibri" pitchFamily="34" charset="0"/>
-                <a:ea typeface="Calibri" pitchFamily="34" charset="-122"/>
-                <a:cs typeface="Calibri" pitchFamily="34" charset="-120"/>
-              </a:rPr>
-              <a:t>Measure with a control group</a:t>
-            </a:r>
-            <a:endParaRPr lang="en-US" sz="1933" dirty="0"/>
-          </a:p>
-        </p:txBody>
-      </p:sp>
-      <p:sp>
-        <p:nvSpPr>
-          <p:cNvPr id="28" name="Text 21"/>
-          <p:cNvSpPr/>
-          <p:nvPr/>
-        </p:nvSpPr>
-        <p:spPr>
-          <a:xfrm>
-            <a:off x="1767840" y="6083808"/>
-            <a:ext cx="9570720" cy="365760"/>
-          </a:xfrm>
-          <a:prstGeom prst="rect">
-            <a:avLst/>
-          </a:prstGeom>
-          <a:noFill/>
-          <a:ln/>
-        </p:spPr>
-        <p:txBody>
-          <a:bodyPr wrap="square" lIns="0" tIns="0" rIns="0" bIns="0" rtlCol="0" anchor="ctr"/>
-          <a:lstStyle/>
-          <a:p>
-            <a:r>
-              <a:rPr lang="en-US" sz="1533" dirty="0">
-                <a:solidFill>
-                  <a:srgbClr val="2B2F3A"/>
-                </a:solidFill>
-                <a:latin typeface="Calibri" pitchFamily="34" charset="0"/>
-                <a:ea typeface="Calibri" pitchFamily="34" charset="-122"/>
-                <a:cs typeface="Calibri" pitchFamily="34" charset="-120"/>
-              </a:rPr>
-              <a:t>Hold out an untargeted group to prove the campaign's ROI and learn the true save-rate.</a:t>
-            </a:r>
-            <a:endParaRPr lang="en-US" sz="1533" dirty="0"/>
-          </a:p>
-        </p:txBody>
-      </p:sp>
-    </p:spTree>
-  </p:cSld>
-  <p:clrMapOvr>
-    <a:masterClrMapping/>
-  </p:clrMapOvr>
-</p:sld>
-</file>
-
-<file path=ppt/slides/slide6.xml><?xml version="1.0" encoding="utf-8"?>
-<p:sld xmlns:a="http://schemas.openxmlformats.org/drawingml/2006/main" xmlns:r="http://schemas.openxmlformats.org/officeDocument/2006/relationships" xmlns:p="http://schemas.openxmlformats.org/presentationml/2006/main">
-  <p:cSld>
-    <p:spTree>
-      <p:nvGrpSpPr>
-        <p:cNvPr id="1" name=""/>
-        <p:cNvGrpSpPr/>
-        <p:nvPr/>
-      </p:nvGrpSpPr>
-      <p:grpSpPr>
-        <a:xfrm>
-          <a:off x="0" y="0"/>
-          <a:ext cx="0" cy="0"/>
-          <a:chOff x="0" y="0"/>
-          <a:chExt cx="0" cy="0"/>
-        </a:xfrm>
-      </p:grpSpPr>
-      <p:sp>
-        <p:nvSpPr>
-          <p:cNvPr id="2" name="Text 0"/>
-          <p:cNvSpPr/>
-          <p:nvPr/>
-        </p:nvSpPr>
-        <p:spPr>
-          <a:xfrm>
             <a:off x="975360" y="1767840"/>
             <a:ext cx="10241280" cy="426720"/>
           </a:xfrm>
@@ -7352,7 +6636,7 @@
                 <a:ea typeface="Calibri" pitchFamily="34" charset="-122"/>
                 <a:cs typeface="Calibri" pitchFamily="34" charset="-120"/>
               </a:rPr>
-              <a:t>Pilot on the next-quarter retention campaign, with a control group</a:t>
+              <a:t>Try it on the next campaign, with a control group</a:t>
             </a:r>
             <a:endParaRPr lang="en-US" sz="2133" dirty="0">
               <a:solidFill>
@@ -7377,7 +6661,7 @@
                 <a:ea typeface="Calibri" pitchFamily="34" charset="-122"/>
                 <a:cs typeface="Calibri" pitchFamily="34" charset="-120"/>
               </a:rPr>
-              <a:t>Measure the lift in euros, not just accuracy</a:t>
+              <a:t>Measure the result in money, not just accuracy</a:t>
             </a:r>
             <a:endParaRPr lang="en-US" sz="2133" dirty="0">
               <a:solidFill>
@@ -7402,7 +6686,7 @@
                 <a:ea typeface="Calibri" pitchFamily="34" charset="-122"/>
                 <a:cs typeface="Calibri" pitchFamily="34" charset="-120"/>
               </a:rPr>
-              <a:t>Refresh the model each quarter as new outcomes come in</a:t>
+              <a:t>Refresh the model every quarter as new results come in</a:t>
             </a:r>
             <a:endParaRPr lang="en-US" sz="2133" dirty="0">
               <a:solidFill>
